--- a/docs/pptx/auc3/ritu-auc3-linsubhr-sens-anemia3_10pct.pptx
+++ b/docs/pptx/auc3/ritu-auc3-linsubhr-sens-anemia3_10pct.pptx
@@ -2443,7 +2443,7 @@
           </p:nvSpPr>
           <p:spPr>
             <a:xfrm>
-              <a:off x="1342929" y="2073503"/>
+              <a:off x="1343231" y="2073503"/>
               <a:ext cx="0" cy="3649639"/>
             </a:xfrm>
             <a:custGeom>
@@ -2486,7 +2486,7 @@
           </p:nvSpPr>
           <p:spPr>
             <a:xfrm>
-              <a:off x="2182565" y="2073503"/>
+              <a:off x="2181282" y="2073503"/>
               <a:ext cx="0" cy="3649639"/>
             </a:xfrm>
             <a:custGeom>
@@ -2529,7 +2529,7 @@
           </p:nvSpPr>
           <p:spPr>
             <a:xfrm>
-              <a:off x="3022201" y="2073503"/>
+              <a:off x="3019333" y="2073503"/>
               <a:ext cx="0" cy="3649639"/>
             </a:xfrm>
             <a:custGeom>
@@ -2572,7 +2572,7 @@
           </p:nvSpPr>
           <p:spPr>
             <a:xfrm>
-              <a:off x="3861838" y="2073503"/>
+              <a:off x="3857383" y="2073503"/>
               <a:ext cx="0" cy="3649639"/>
             </a:xfrm>
             <a:custGeom>
@@ -2615,7 +2615,7 @@
           </p:nvSpPr>
           <p:spPr>
             <a:xfrm>
-              <a:off x="4701474" y="2073503"/>
+              <a:off x="4695434" y="2073503"/>
               <a:ext cx="0" cy="3649639"/>
             </a:xfrm>
             <a:custGeom>
@@ -2658,7 +2658,7 @@
           </p:nvSpPr>
           <p:spPr>
             <a:xfrm>
-              <a:off x="5541110" y="2073503"/>
+              <a:off x="5533485" y="2073503"/>
               <a:ext cx="0" cy="3649639"/>
             </a:xfrm>
             <a:custGeom>
@@ -2701,7 +2701,7 @@
           </p:nvSpPr>
           <p:spPr>
             <a:xfrm>
-              <a:off x="6380746" y="2073503"/>
+              <a:off x="6371535" y="2073503"/>
               <a:ext cx="0" cy="3649639"/>
             </a:xfrm>
             <a:custGeom>
@@ -2744,7 +2744,7 @@
           </p:nvSpPr>
           <p:spPr>
             <a:xfrm>
-              <a:off x="7220382" y="2073503"/>
+              <a:off x="7209586" y="2073503"/>
               <a:ext cx="0" cy="3649639"/>
             </a:xfrm>
             <a:custGeom>
@@ -2787,7 +2787,7 @@
           </p:nvSpPr>
           <p:spPr>
             <a:xfrm>
-              <a:off x="8060018" y="2073503"/>
+              <a:off x="8047636" y="2073503"/>
               <a:ext cx="0" cy="3649639"/>
             </a:xfrm>
             <a:custGeom>
@@ -3045,7 +3045,7 @@
           </p:nvSpPr>
           <p:spPr>
             <a:xfrm>
-              <a:off x="923111" y="2073503"/>
+              <a:off x="924206" y="2073503"/>
               <a:ext cx="0" cy="3649639"/>
             </a:xfrm>
             <a:custGeom>
@@ -3088,7 +3088,7 @@
           </p:nvSpPr>
           <p:spPr>
             <a:xfrm>
-              <a:off x="1762747" y="2073503"/>
+              <a:off x="1762257" y="2073503"/>
               <a:ext cx="0" cy="3649639"/>
             </a:xfrm>
             <a:custGeom>
@@ -3131,7 +3131,7 @@
           </p:nvSpPr>
           <p:spPr>
             <a:xfrm>
-              <a:off x="2602383" y="2073503"/>
+              <a:off x="2600307" y="2073503"/>
               <a:ext cx="0" cy="3649639"/>
             </a:xfrm>
             <a:custGeom>
@@ -3174,7 +3174,7 @@
           </p:nvSpPr>
           <p:spPr>
             <a:xfrm>
-              <a:off x="3442019" y="2073503"/>
+              <a:off x="3438358" y="2073503"/>
               <a:ext cx="0" cy="3649639"/>
             </a:xfrm>
             <a:custGeom>
@@ -3217,7 +3217,7 @@
           </p:nvSpPr>
           <p:spPr>
             <a:xfrm>
-              <a:off x="4281656" y="2073503"/>
+              <a:off x="4276409" y="2073503"/>
               <a:ext cx="0" cy="3649639"/>
             </a:xfrm>
             <a:custGeom>
@@ -3260,7 +3260,7 @@
           </p:nvSpPr>
           <p:spPr>
             <a:xfrm>
-              <a:off x="5121292" y="2073503"/>
+              <a:off x="5114459" y="2073503"/>
               <a:ext cx="0" cy="3649639"/>
             </a:xfrm>
             <a:custGeom>
@@ -3303,7 +3303,7 @@
           </p:nvSpPr>
           <p:spPr>
             <a:xfrm>
-              <a:off x="5960928" y="2073503"/>
+              <a:off x="5952510" y="2073503"/>
               <a:ext cx="0" cy="3649639"/>
             </a:xfrm>
             <a:custGeom>
@@ -3346,7 +3346,7 @@
           </p:nvSpPr>
           <p:spPr>
             <a:xfrm>
-              <a:off x="6800564" y="2073503"/>
+              <a:off x="6790560" y="2073503"/>
               <a:ext cx="0" cy="3649639"/>
             </a:xfrm>
             <a:custGeom>
@@ -3389,7 +3389,7 @@
           </p:nvSpPr>
           <p:spPr>
             <a:xfrm>
-              <a:off x="7640200" y="2073503"/>
+              <a:off x="7628611" y="2073503"/>
               <a:ext cx="0" cy="3649639"/>
             </a:xfrm>
             <a:custGeom>
@@ -3432,7 +3432,7 @@
           </p:nvSpPr>
           <p:spPr>
             <a:xfrm>
-              <a:off x="8479836" y="2073503"/>
+              <a:off x="8466662" y="2073503"/>
               <a:ext cx="0" cy="3649639"/>
             </a:xfrm>
             <a:custGeom>
@@ -3476,530 +3476,530 @@
           <p:spPr>
             <a:xfrm>
               <a:off x="1172049" y="2073503"/>
-              <a:ext cx="7090630" cy="3473938"/>
+              <a:ext cx="7090630" cy="3473342"/>
             </a:xfrm>
             <a:custGeom>
               <a:avLst/>
               <a:pathLst>
-                <a:path w="7090630" h="3473938">
+                <a:path w="7090630" h="3473342">
                   <a:moveTo>
-                    <a:pt x="1981981" y="0"/>
+                    <a:pt x="1993852" y="0"/>
                   </a:moveTo>
                   <a:lnTo>
-                    <a:pt x="2005430" y="95193"/>
-                  </a:lnTo>
-                  <a:lnTo>
-                    <a:pt x="2077053" y="362974"/>
-                  </a:lnTo>
-                  <a:lnTo>
-                    <a:pt x="2148675" y="609593"/>
-                  </a:lnTo>
-                  <a:lnTo>
-                    <a:pt x="2220298" y="836723"/>
-                  </a:lnTo>
-                  <a:lnTo>
-                    <a:pt x="2291920" y="1045905"/>
-                  </a:lnTo>
-                  <a:lnTo>
-                    <a:pt x="2363543" y="1238556"/>
-                  </a:lnTo>
-                  <a:lnTo>
-                    <a:pt x="2435165" y="1415982"/>
-                  </a:lnTo>
-                  <a:lnTo>
-                    <a:pt x="2506788" y="1579387"/>
-                  </a:lnTo>
-                  <a:lnTo>
-                    <a:pt x="2578410" y="1729880"/>
-                  </a:lnTo>
-                  <a:lnTo>
-                    <a:pt x="2650033" y="1868479"/>
-                  </a:lnTo>
-                  <a:lnTo>
-                    <a:pt x="2721655" y="1996126"/>
-                  </a:lnTo>
-                  <a:lnTo>
-                    <a:pt x="2793278" y="2113685"/>
-                  </a:lnTo>
-                  <a:lnTo>
-                    <a:pt x="2864901" y="2221955"/>
-                  </a:lnTo>
-                  <a:lnTo>
-                    <a:pt x="2936523" y="2321668"/>
-                  </a:lnTo>
-                  <a:lnTo>
-                    <a:pt x="3008146" y="2413501"/>
-                  </a:lnTo>
-                  <a:lnTo>
-                    <a:pt x="3079768" y="2498077"/>
-                  </a:lnTo>
-                  <a:lnTo>
-                    <a:pt x="3151391" y="2575970"/>
-                  </a:lnTo>
-                  <a:lnTo>
-                    <a:pt x="3223013" y="2647707"/>
-                  </a:lnTo>
-                  <a:lnTo>
-                    <a:pt x="3294636" y="2652984"/>
-                  </a:lnTo>
-                  <a:lnTo>
-                    <a:pt x="3366258" y="2651545"/>
-                  </a:lnTo>
-                  <a:lnTo>
-                    <a:pt x="3437881" y="2650104"/>
-                  </a:lnTo>
-                  <a:lnTo>
-                    <a:pt x="3509503" y="2648660"/>
-                  </a:lnTo>
-                  <a:lnTo>
-                    <a:pt x="3581126" y="2647213"/>
-                  </a:lnTo>
-                  <a:lnTo>
-                    <a:pt x="3652748" y="2645764"/>
-                  </a:lnTo>
-                  <a:lnTo>
-                    <a:pt x="3724371" y="2644313"/>
-                  </a:lnTo>
-                  <a:lnTo>
-                    <a:pt x="3795993" y="2642859"/>
-                  </a:lnTo>
-                  <a:lnTo>
-                    <a:pt x="3867616" y="2641402"/>
-                  </a:lnTo>
-                  <a:lnTo>
-                    <a:pt x="3939238" y="2639943"/>
-                  </a:lnTo>
-                  <a:lnTo>
-                    <a:pt x="4010861" y="2638482"/>
-                  </a:lnTo>
-                  <a:lnTo>
-                    <a:pt x="4082483" y="2637018"/>
-                  </a:lnTo>
-                  <a:lnTo>
-                    <a:pt x="4154106" y="2635551"/>
-                  </a:lnTo>
-                  <a:lnTo>
-                    <a:pt x="4225729" y="2634082"/>
-                  </a:lnTo>
-                  <a:lnTo>
-                    <a:pt x="4297351" y="2632610"/>
-                  </a:lnTo>
-                  <a:lnTo>
-                    <a:pt x="4368974" y="2631136"/>
-                  </a:lnTo>
-                  <a:lnTo>
-                    <a:pt x="4440596" y="2629659"/>
-                  </a:lnTo>
-                  <a:lnTo>
-                    <a:pt x="4512219" y="2628180"/>
-                  </a:lnTo>
-                  <a:lnTo>
-                    <a:pt x="4583841" y="2626698"/>
-                  </a:lnTo>
-                  <a:lnTo>
-                    <a:pt x="4655464" y="2625214"/>
-                  </a:lnTo>
-                  <a:lnTo>
-                    <a:pt x="4727086" y="2623726"/>
-                  </a:lnTo>
-                  <a:lnTo>
-                    <a:pt x="4798709" y="2622237"/>
-                  </a:lnTo>
-                  <a:lnTo>
-                    <a:pt x="4870331" y="2620745"/>
-                  </a:lnTo>
-                  <a:lnTo>
-                    <a:pt x="4941954" y="2619250"/>
-                  </a:lnTo>
-                  <a:lnTo>
-                    <a:pt x="5013576" y="2617752"/>
-                  </a:lnTo>
-                  <a:lnTo>
-                    <a:pt x="5085199" y="2616252"/>
-                  </a:lnTo>
-                  <a:lnTo>
-                    <a:pt x="5156821" y="2614750"/>
-                  </a:lnTo>
-                  <a:lnTo>
-                    <a:pt x="5228444" y="2613245"/>
-                  </a:lnTo>
-                  <a:lnTo>
-                    <a:pt x="5300066" y="2611737"/>
-                  </a:lnTo>
-                  <a:lnTo>
-                    <a:pt x="5371689" y="2610227"/>
-                  </a:lnTo>
-                  <a:lnTo>
-                    <a:pt x="5443311" y="2608714"/>
-                  </a:lnTo>
-                  <a:lnTo>
-                    <a:pt x="5514934" y="2607198"/>
-                  </a:lnTo>
-                  <a:lnTo>
-                    <a:pt x="5586557" y="2605680"/>
-                  </a:lnTo>
-                  <a:lnTo>
-                    <a:pt x="5658179" y="2604159"/>
-                  </a:lnTo>
-                  <a:lnTo>
-                    <a:pt x="5729802" y="2602635"/>
-                  </a:lnTo>
-                  <a:lnTo>
-                    <a:pt x="5801424" y="2601109"/>
-                  </a:lnTo>
-                  <a:lnTo>
-                    <a:pt x="5873047" y="2599580"/>
-                  </a:lnTo>
-                  <a:lnTo>
-                    <a:pt x="5944669" y="2598049"/>
-                  </a:lnTo>
-                  <a:lnTo>
-                    <a:pt x="6016292" y="2596515"/>
-                  </a:lnTo>
-                  <a:lnTo>
-                    <a:pt x="6087914" y="2594978"/>
-                  </a:lnTo>
-                  <a:lnTo>
-                    <a:pt x="6159537" y="2593439"/>
-                  </a:lnTo>
-                  <a:lnTo>
-                    <a:pt x="6231159" y="2591896"/>
-                  </a:lnTo>
-                  <a:lnTo>
-                    <a:pt x="6302782" y="2590352"/>
-                  </a:lnTo>
-                  <a:lnTo>
-                    <a:pt x="6374404" y="2588804"/>
-                  </a:lnTo>
-                  <a:lnTo>
-                    <a:pt x="6446027" y="2587254"/>
-                  </a:lnTo>
-                  <a:lnTo>
-                    <a:pt x="6517649" y="2585701"/>
-                  </a:lnTo>
-                  <a:lnTo>
-                    <a:pt x="6589272" y="2584146"/>
-                  </a:lnTo>
-                  <a:lnTo>
-                    <a:pt x="6660894" y="2582588"/>
-                  </a:lnTo>
-                  <a:lnTo>
-                    <a:pt x="6732517" y="2581027"/>
-                  </a:lnTo>
-                  <a:lnTo>
-                    <a:pt x="6804139" y="2579463"/>
-                  </a:lnTo>
-                  <a:lnTo>
-                    <a:pt x="6875762" y="2577897"/>
-                  </a:lnTo>
-                  <a:lnTo>
-                    <a:pt x="6947385" y="2576328"/>
-                  </a:lnTo>
-                  <a:lnTo>
-                    <a:pt x="7019007" y="2574756"/>
-                  </a:lnTo>
-                  <a:lnTo>
-                    <a:pt x="7090630" y="2573182"/>
-                  </a:lnTo>
-                  <a:lnTo>
-                    <a:pt x="7090630" y="3473938"/>
-                  </a:lnTo>
-                  <a:lnTo>
-                    <a:pt x="7019007" y="3473096"/>
-                  </a:lnTo>
-                  <a:lnTo>
-                    <a:pt x="6947385" y="3472182"/>
-                  </a:lnTo>
-                  <a:lnTo>
-                    <a:pt x="6875762" y="3471190"/>
-                  </a:lnTo>
-                  <a:lnTo>
-                    <a:pt x="6804139" y="3470113"/>
-                  </a:lnTo>
-                  <a:lnTo>
-                    <a:pt x="6732517" y="3468943"/>
-                  </a:lnTo>
-                  <a:lnTo>
-                    <a:pt x="6660894" y="3467673"/>
-                  </a:lnTo>
-                  <a:lnTo>
-                    <a:pt x="6589272" y="3466293"/>
-                  </a:lnTo>
-                  <a:lnTo>
-                    <a:pt x="6517649" y="3464796"/>
-                  </a:lnTo>
-                  <a:lnTo>
-                    <a:pt x="6446027" y="3463170"/>
-                  </a:lnTo>
-                  <a:lnTo>
-                    <a:pt x="6374404" y="3461404"/>
-                  </a:lnTo>
-                  <a:lnTo>
-                    <a:pt x="6302782" y="3459487"/>
-                  </a:lnTo>
-                  <a:lnTo>
-                    <a:pt x="6231159" y="3457405"/>
-                  </a:lnTo>
-                  <a:lnTo>
-                    <a:pt x="6159537" y="3455145"/>
-                  </a:lnTo>
-                  <a:lnTo>
-                    <a:pt x="6087914" y="3452691"/>
-                  </a:lnTo>
-                  <a:lnTo>
-                    <a:pt x="6016292" y="3450026"/>
-                  </a:lnTo>
-                  <a:lnTo>
-                    <a:pt x="5944669" y="3447133"/>
-                  </a:lnTo>
-                  <a:lnTo>
-                    <a:pt x="5873047" y="3443991"/>
-                  </a:lnTo>
-                  <a:lnTo>
-                    <a:pt x="5801424" y="3440580"/>
-                  </a:lnTo>
-                  <a:lnTo>
-                    <a:pt x="5729802" y="3436876"/>
-                  </a:lnTo>
-                  <a:lnTo>
-                    <a:pt x="5658179" y="3432854"/>
-                  </a:lnTo>
-                  <a:lnTo>
-                    <a:pt x="5586557" y="3428487"/>
-                  </a:lnTo>
-                  <a:lnTo>
-                    <a:pt x="5514934" y="3423746"/>
-                  </a:lnTo>
-                  <a:lnTo>
-                    <a:pt x="5443311" y="3418597"/>
-                  </a:lnTo>
-                  <a:lnTo>
-                    <a:pt x="5371689" y="3413007"/>
-                  </a:lnTo>
-                  <a:lnTo>
-                    <a:pt x="5300066" y="3406937"/>
-                  </a:lnTo>
-                  <a:lnTo>
-                    <a:pt x="5228444" y="3400347"/>
-                  </a:lnTo>
-                  <a:lnTo>
-                    <a:pt x="5156821" y="3393191"/>
-                  </a:lnTo>
-                  <a:lnTo>
-                    <a:pt x="5085199" y="3385420"/>
-                  </a:lnTo>
-                  <a:lnTo>
-                    <a:pt x="5013576" y="3376983"/>
-                  </a:lnTo>
-                  <a:lnTo>
-                    <a:pt x="4941954" y="3367822"/>
-                  </a:lnTo>
-                  <a:lnTo>
-                    <a:pt x="4870331" y="3357875"/>
-                  </a:lnTo>
-                  <a:lnTo>
-                    <a:pt x="4798709" y="3347075"/>
-                  </a:lnTo>
-                  <a:lnTo>
-                    <a:pt x="4727086" y="3335348"/>
-                  </a:lnTo>
-                  <a:lnTo>
-                    <a:pt x="4655464" y="3322614"/>
-                  </a:lnTo>
-                  <a:lnTo>
-                    <a:pt x="4583841" y="3308788"/>
-                  </a:lnTo>
-                  <a:lnTo>
-                    <a:pt x="4512219" y="3293776"/>
-                  </a:lnTo>
-                  <a:lnTo>
-                    <a:pt x="4440596" y="3277475"/>
-                  </a:lnTo>
-                  <a:lnTo>
-                    <a:pt x="4368974" y="3259776"/>
-                  </a:lnTo>
-                  <a:lnTo>
-                    <a:pt x="4297351" y="3240558"/>
-                  </a:lnTo>
-                  <a:lnTo>
-                    <a:pt x="4225729" y="3219691"/>
-                  </a:lnTo>
-                  <a:lnTo>
-                    <a:pt x="4154106" y="3197033"/>
-                  </a:lnTo>
-                  <a:lnTo>
-                    <a:pt x="4082483" y="3172431"/>
-                  </a:lnTo>
-                  <a:lnTo>
-                    <a:pt x="4010861" y="3145719"/>
-                  </a:lnTo>
-                  <a:lnTo>
-                    <a:pt x="3939238" y="3116714"/>
-                  </a:lnTo>
-                  <a:lnTo>
-                    <a:pt x="3867616" y="3085220"/>
-                  </a:lnTo>
-                  <a:lnTo>
-                    <a:pt x="3795993" y="3051025"/>
-                  </a:lnTo>
-                  <a:lnTo>
-                    <a:pt x="3724371" y="3013894"/>
-                  </a:lnTo>
-                  <a:lnTo>
-                    <a:pt x="3652748" y="2973578"/>
-                  </a:lnTo>
-                  <a:lnTo>
-                    <a:pt x="3581126" y="2929803"/>
-                  </a:lnTo>
-                  <a:lnTo>
-                    <a:pt x="3509503" y="2882271"/>
-                  </a:lnTo>
-                  <a:lnTo>
-                    <a:pt x="3437881" y="2830661"/>
-                  </a:lnTo>
-                  <a:lnTo>
-                    <a:pt x="3366258" y="2774622"/>
-                  </a:lnTo>
-                  <a:lnTo>
-                    <a:pt x="3294636" y="2713775"/>
-                  </a:lnTo>
-                  <a:lnTo>
-                    <a:pt x="3223013" y="2654421"/>
-                  </a:lnTo>
-                  <a:lnTo>
-                    <a:pt x="3151391" y="2655855"/>
-                  </a:lnTo>
-                  <a:lnTo>
-                    <a:pt x="3079768" y="2657286"/>
-                  </a:lnTo>
-                  <a:lnTo>
-                    <a:pt x="3008146" y="2658715"/>
-                  </a:lnTo>
-                  <a:lnTo>
-                    <a:pt x="2936523" y="2660142"/>
-                  </a:lnTo>
-                  <a:lnTo>
-                    <a:pt x="2864901" y="2661566"/>
-                  </a:lnTo>
-                  <a:lnTo>
-                    <a:pt x="2793278" y="2662987"/>
-                  </a:lnTo>
-                  <a:lnTo>
-                    <a:pt x="2721655" y="2664406"/>
-                  </a:lnTo>
-                  <a:lnTo>
-                    <a:pt x="2650033" y="2665823"/>
-                  </a:lnTo>
-                  <a:lnTo>
-                    <a:pt x="2578410" y="2667237"/>
-                  </a:lnTo>
-                  <a:lnTo>
-                    <a:pt x="2506788" y="2668649"/>
-                  </a:lnTo>
-                  <a:lnTo>
-                    <a:pt x="2435165" y="2670059"/>
-                  </a:lnTo>
-                  <a:lnTo>
-                    <a:pt x="2363543" y="2671466"/>
-                  </a:lnTo>
-                  <a:lnTo>
-                    <a:pt x="2291920" y="2672870"/>
-                  </a:lnTo>
-                  <a:lnTo>
-                    <a:pt x="2220298" y="2674272"/>
-                  </a:lnTo>
-                  <a:lnTo>
-                    <a:pt x="2148675" y="2675672"/>
-                  </a:lnTo>
-                  <a:lnTo>
-                    <a:pt x="2077053" y="2677069"/>
-                  </a:lnTo>
-                  <a:lnTo>
-                    <a:pt x="2005430" y="2678464"/>
-                  </a:lnTo>
-                  <a:lnTo>
-                    <a:pt x="1933808" y="2679856"/>
-                  </a:lnTo>
-                  <a:lnTo>
-                    <a:pt x="1862185" y="2681246"/>
-                  </a:lnTo>
-                  <a:lnTo>
-                    <a:pt x="1790563" y="2682634"/>
-                  </a:lnTo>
-                  <a:lnTo>
-                    <a:pt x="1718940" y="2684019"/>
-                  </a:lnTo>
-                  <a:lnTo>
-                    <a:pt x="1647318" y="2685402"/>
-                  </a:lnTo>
-                  <a:lnTo>
-                    <a:pt x="1575695" y="2686782"/>
-                  </a:lnTo>
-                  <a:lnTo>
-                    <a:pt x="1504073" y="2688160"/>
-                  </a:lnTo>
-                  <a:lnTo>
-                    <a:pt x="1432450" y="2689536"/>
-                  </a:lnTo>
-                  <a:lnTo>
-                    <a:pt x="1360827" y="2690909"/>
-                  </a:lnTo>
-                  <a:lnTo>
-                    <a:pt x="1289205" y="2692280"/>
-                  </a:lnTo>
-                  <a:lnTo>
-                    <a:pt x="1217582" y="2693649"/>
-                  </a:lnTo>
-                  <a:lnTo>
-                    <a:pt x="1145960" y="2695015"/>
-                  </a:lnTo>
-                  <a:lnTo>
-                    <a:pt x="1074337" y="2696379"/>
-                  </a:lnTo>
-                  <a:lnTo>
-                    <a:pt x="1002715" y="2697740"/>
-                  </a:lnTo>
-                  <a:lnTo>
-                    <a:pt x="931092" y="2699099"/>
-                  </a:lnTo>
-                  <a:lnTo>
-                    <a:pt x="859470" y="2700456"/>
-                  </a:lnTo>
-                  <a:lnTo>
-                    <a:pt x="787847" y="2701810"/>
-                  </a:lnTo>
-                  <a:lnTo>
-                    <a:pt x="716225" y="2703162"/>
-                  </a:lnTo>
-                  <a:lnTo>
-                    <a:pt x="644602" y="2704512"/>
-                  </a:lnTo>
-                  <a:lnTo>
-                    <a:pt x="572980" y="2705859"/>
-                  </a:lnTo>
-                  <a:lnTo>
-                    <a:pt x="501357" y="2707204"/>
-                  </a:lnTo>
-                  <a:lnTo>
-                    <a:pt x="429735" y="2708547"/>
-                  </a:lnTo>
-                  <a:lnTo>
-                    <a:pt x="358112" y="2709888"/>
-                  </a:lnTo>
-                  <a:lnTo>
-                    <a:pt x="286490" y="2711226"/>
-                  </a:lnTo>
-                  <a:lnTo>
-                    <a:pt x="214867" y="2712561"/>
-                  </a:lnTo>
-                  <a:lnTo>
-                    <a:pt x="143245" y="2713895"/>
-                  </a:lnTo>
-                  <a:lnTo>
-                    <a:pt x="71622" y="2715226"/>
-                  </a:lnTo>
-                  <a:lnTo>
-                    <a:pt x="0" y="2716555"/>
+                    <a:pt x="2005430" y="47284"/>
+                  </a:lnTo>
+                  <a:lnTo>
+                    <a:pt x="2077053" y="316845"/>
+                  </a:lnTo>
+                  <a:lnTo>
+                    <a:pt x="2148675" y="565262"/>
+                  </a:lnTo>
+                  <a:lnTo>
+                    <a:pt x="2220298" y="794193"/>
+                  </a:lnTo>
+                  <a:lnTo>
+                    <a:pt x="2291920" y="1005166"/>
+                  </a:lnTo>
+                  <a:lnTo>
+                    <a:pt x="2363543" y="1199590"/>
+                  </a:lnTo>
+                  <a:lnTo>
+                    <a:pt x="2435165" y="1378763"/>
+                  </a:lnTo>
+                  <a:lnTo>
+                    <a:pt x="2506788" y="1543881"/>
+                  </a:lnTo>
+                  <a:lnTo>
+                    <a:pt x="2578410" y="1696047"/>
+                  </a:lnTo>
+                  <a:lnTo>
+                    <a:pt x="2650033" y="1836277"/>
+                  </a:lnTo>
+                  <a:lnTo>
+                    <a:pt x="2721655" y="1965507"/>
+                  </a:lnTo>
+                  <a:lnTo>
+                    <a:pt x="2793278" y="2084600"/>
+                  </a:lnTo>
+                  <a:lnTo>
+                    <a:pt x="2864901" y="2194352"/>
+                  </a:lnTo>
+                  <a:lnTo>
+                    <a:pt x="2936523" y="2295494"/>
+                  </a:lnTo>
+                  <a:lnTo>
+                    <a:pt x="3008146" y="2388702"/>
+                  </a:lnTo>
+                  <a:lnTo>
+                    <a:pt x="3079768" y="2474599"/>
+                  </a:lnTo>
+                  <a:lnTo>
+                    <a:pt x="3151391" y="2553759"/>
+                  </a:lnTo>
+                  <a:lnTo>
+                    <a:pt x="3223013" y="2626708"/>
+                  </a:lnTo>
+                  <a:lnTo>
+                    <a:pt x="3294636" y="2653294"/>
+                  </a:lnTo>
+                  <a:lnTo>
+                    <a:pt x="3366258" y="2651641"/>
+                  </a:lnTo>
+                  <a:lnTo>
+                    <a:pt x="3437881" y="2649986"/>
+                  </a:lnTo>
+                  <a:lnTo>
+                    <a:pt x="3509503" y="2648327"/>
+                  </a:lnTo>
+                  <a:lnTo>
+                    <a:pt x="3581126" y="2646665"/>
+                  </a:lnTo>
+                  <a:lnTo>
+                    <a:pt x="3652748" y="2645000"/>
+                  </a:lnTo>
+                  <a:lnTo>
+                    <a:pt x="3724371" y="2643331"/>
+                  </a:lnTo>
+                  <a:lnTo>
+                    <a:pt x="3795993" y="2641659"/>
+                  </a:lnTo>
+                  <a:lnTo>
+                    <a:pt x="3867616" y="2639984"/>
+                  </a:lnTo>
+                  <a:lnTo>
+                    <a:pt x="3939238" y="2638305"/>
+                  </a:lnTo>
+                  <a:lnTo>
+                    <a:pt x="4010861" y="2636623"/>
+                  </a:lnTo>
+                  <a:lnTo>
+                    <a:pt x="4082483" y="2634938"/>
+                  </a:lnTo>
+                  <a:lnTo>
+                    <a:pt x="4154106" y="2633249"/>
+                  </a:lnTo>
+                  <a:lnTo>
+                    <a:pt x="4225729" y="2631557"/>
+                  </a:lnTo>
+                  <a:lnTo>
+                    <a:pt x="4297351" y="2629861"/>
+                  </a:lnTo>
+                  <a:lnTo>
+                    <a:pt x="4368974" y="2628163"/>
+                  </a:lnTo>
+                  <a:lnTo>
+                    <a:pt x="4440596" y="2626460"/>
+                  </a:lnTo>
+                  <a:lnTo>
+                    <a:pt x="4512219" y="2624755"/>
+                  </a:lnTo>
+                  <a:lnTo>
+                    <a:pt x="4583841" y="2623046"/>
+                  </a:lnTo>
+                  <a:lnTo>
+                    <a:pt x="4655464" y="2621334"/>
+                  </a:lnTo>
+                  <a:lnTo>
+                    <a:pt x="4727086" y="2619618"/>
+                  </a:lnTo>
+                  <a:lnTo>
+                    <a:pt x="4798709" y="2617899"/>
+                  </a:lnTo>
+                  <a:lnTo>
+                    <a:pt x="4870331" y="2616176"/>
+                  </a:lnTo>
+                  <a:lnTo>
+                    <a:pt x="4941954" y="2614450"/>
+                  </a:lnTo>
+                  <a:lnTo>
+                    <a:pt x="5013576" y="2612720"/>
+                  </a:lnTo>
+                  <a:lnTo>
+                    <a:pt x="5085199" y="2610987"/>
+                  </a:lnTo>
+                  <a:lnTo>
+                    <a:pt x="5156821" y="2609251"/>
+                  </a:lnTo>
+                  <a:lnTo>
+                    <a:pt x="5228444" y="2607511"/>
+                  </a:lnTo>
+                  <a:lnTo>
+                    <a:pt x="5300066" y="2605768"/>
+                  </a:lnTo>
+                  <a:lnTo>
+                    <a:pt x="5371689" y="2604021"/>
+                  </a:lnTo>
+                  <a:lnTo>
+                    <a:pt x="5443311" y="2602271"/>
+                  </a:lnTo>
+                  <a:lnTo>
+                    <a:pt x="5514934" y="2600517"/>
+                  </a:lnTo>
+                  <a:lnTo>
+                    <a:pt x="5586557" y="2598760"/>
+                  </a:lnTo>
+                  <a:lnTo>
+                    <a:pt x="5658179" y="2596999"/>
+                  </a:lnTo>
+                  <a:lnTo>
+                    <a:pt x="5729802" y="2595235"/>
+                  </a:lnTo>
+                  <a:lnTo>
+                    <a:pt x="5801424" y="2593468"/>
+                  </a:lnTo>
+                  <a:lnTo>
+                    <a:pt x="5873047" y="2591696"/>
+                  </a:lnTo>
+                  <a:lnTo>
+                    <a:pt x="5944669" y="2589922"/>
+                  </a:lnTo>
+                  <a:lnTo>
+                    <a:pt x="6016292" y="2588143"/>
+                  </a:lnTo>
+                  <a:lnTo>
+                    <a:pt x="6087914" y="2586362"/>
+                  </a:lnTo>
+                  <a:lnTo>
+                    <a:pt x="6159537" y="2584576"/>
+                  </a:lnTo>
+                  <a:lnTo>
+                    <a:pt x="6231159" y="2582787"/>
+                  </a:lnTo>
+                  <a:lnTo>
+                    <a:pt x="6302782" y="2580995"/>
+                  </a:lnTo>
+                  <a:lnTo>
+                    <a:pt x="6374404" y="2579199"/>
+                  </a:lnTo>
+                  <a:lnTo>
+                    <a:pt x="6446027" y="2577399"/>
+                  </a:lnTo>
+                  <a:lnTo>
+                    <a:pt x="6517649" y="2575596"/>
+                  </a:lnTo>
+                  <a:lnTo>
+                    <a:pt x="6589272" y="2573789"/>
+                  </a:lnTo>
+                  <a:lnTo>
+                    <a:pt x="6660894" y="2571979"/>
+                  </a:lnTo>
+                  <a:lnTo>
+                    <a:pt x="6732517" y="2570165"/>
+                  </a:lnTo>
+                  <a:lnTo>
+                    <a:pt x="6804139" y="2568347"/>
+                  </a:lnTo>
+                  <a:lnTo>
+                    <a:pt x="6875762" y="2566526"/>
+                  </a:lnTo>
+                  <a:lnTo>
+                    <a:pt x="6947385" y="2564701"/>
+                  </a:lnTo>
+                  <a:lnTo>
+                    <a:pt x="7019007" y="2562873"/>
+                  </a:lnTo>
+                  <a:lnTo>
+                    <a:pt x="7090630" y="2561041"/>
+                  </a:lnTo>
+                  <a:lnTo>
+                    <a:pt x="7090630" y="3473342"/>
+                  </a:lnTo>
+                  <a:lnTo>
+                    <a:pt x="7019007" y="3472456"/>
+                  </a:lnTo>
+                  <a:lnTo>
+                    <a:pt x="6947385" y="3471495"/>
+                  </a:lnTo>
+                  <a:lnTo>
+                    <a:pt x="6875762" y="3470452"/>
+                  </a:lnTo>
+                  <a:lnTo>
+                    <a:pt x="6804139" y="3469321"/>
+                  </a:lnTo>
+                  <a:lnTo>
+                    <a:pt x="6732517" y="3468093"/>
+                  </a:lnTo>
+                  <a:lnTo>
+                    <a:pt x="6660894" y="3466760"/>
+                  </a:lnTo>
+                  <a:lnTo>
+                    <a:pt x="6589272" y="3465314"/>
+                  </a:lnTo>
+                  <a:lnTo>
+                    <a:pt x="6517649" y="3463745"/>
+                  </a:lnTo>
+                  <a:lnTo>
+                    <a:pt x="6446027" y="3462043"/>
+                  </a:lnTo>
+                  <a:lnTo>
+                    <a:pt x="6374404" y="3460196"/>
+                  </a:lnTo>
+                  <a:lnTo>
+                    <a:pt x="6302782" y="3458191"/>
+                  </a:lnTo>
+                  <a:lnTo>
+                    <a:pt x="6231159" y="3456016"/>
+                  </a:lnTo>
+                  <a:lnTo>
+                    <a:pt x="6159537" y="3453655"/>
+                  </a:lnTo>
+                  <a:lnTo>
+                    <a:pt x="6087914" y="3451094"/>
+                  </a:lnTo>
+                  <a:lnTo>
+                    <a:pt x="6016292" y="3448315"/>
+                  </a:lnTo>
+                  <a:lnTo>
+                    <a:pt x="5944669" y="3445299"/>
+                  </a:lnTo>
+                  <a:lnTo>
+                    <a:pt x="5873047" y="3442026"/>
+                  </a:lnTo>
+                  <a:lnTo>
+                    <a:pt x="5801424" y="3438475"/>
+                  </a:lnTo>
+                  <a:lnTo>
+                    <a:pt x="5729802" y="3434622"/>
+                  </a:lnTo>
+                  <a:lnTo>
+                    <a:pt x="5658179" y="3430440"/>
+                  </a:lnTo>
+                  <a:lnTo>
+                    <a:pt x="5586557" y="3425903"/>
+                  </a:lnTo>
+                  <a:lnTo>
+                    <a:pt x="5514934" y="3420979"/>
+                  </a:lnTo>
+                  <a:lnTo>
+                    <a:pt x="5443311" y="3415637"/>
+                  </a:lnTo>
+                  <a:lnTo>
+                    <a:pt x="5371689" y="3409839"/>
+                  </a:lnTo>
+                  <a:lnTo>
+                    <a:pt x="5300066" y="3403549"/>
+                  </a:lnTo>
+                  <a:lnTo>
+                    <a:pt x="5228444" y="3396722"/>
+                  </a:lnTo>
+                  <a:lnTo>
+                    <a:pt x="5156821" y="3389315"/>
+                  </a:lnTo>
+                  <a:lnTo>
+                    <a:pt x="5085199" y="3381277"/>
+                  </a:lnTo>
+                  <a:lnTo>
+                    <a:pt x="5013576" y="3372555"/>
+                  </a:lnTo>
+                  <a:lnTo>
+                    <a:pt x="4941954" y="3363090"/>
+                  </a:lnTo>
+                  <a:lnTo>
+                    <a:pt x="4870331" y="3352820"/>
+                  </a:lnTo>
+                  <a:lnTo>
+                    <a:pt x="4798709" y="3341676"/>
+                  </a:lnTo>
+                  <a:lnTo>
+                    <a:pt x="4727086" y="3329583"/>
+                  </a:lnTo>
+                  <a:lnTo>
+                    <a:pt x="4655464" y="3316461"/>
+                  </a:lnTo>
+                  <a:lnTo>
+                    <a:pt x="4583841" y="3302222"/>
+                  </a:lnTo>
+                  <a:lnTo>
+                    <a:pt x="4512219" y="3286771"/>
+                  </a:lnTo>
+                  <a:lnTo>
+                    <a:pt x="4440596" y="3270005"/>
+                  </a:lnTo>
+                  <a:lnTo>
+                    <a:pt x="4368974" y="3251812"/>
+                  </a:lnTo>
+                  <a:lnTo>
+                    <a:pt x="4297351" y="3232070"/>
+                  </a:lnTo>
+                  <a:lnTo>
+                    <a:pt x="4225729" y="3210647"/>
+                  </a:lnTo>
+                  <a:lnTo>
+                    <a:pt x="4154106" y="3187402"/>
+                  </a:lnTo>
+                  <a:lnTo>
+                    <a:pt x="4082483" y="3162177"/>
+                  </a:lnTo>
+                  <a:lnTo>
+                    <a:pt x="4010861" y="3134806"/>
+                  </a:lnTo>
+                  <a:lnTo>
+                    <a:pt x="3939238" y="3105104"/>
+                  </a:lnTo>
+                  <a:lnTo>
+                    <a:pt x="3867616" y="3072875"/>
+                  </a:lnTo>
+                  <a:lnTo>
+                    <a:pt x="3795993" y="3037902"/>
+                  </a:lnTo>
+                  <a:lnTo>
+                    <a:pt x="3724371" y="2999953"/>
+                  </a:lnTo>
+                  <a:lnTo>
+                    <a:pt x="3652748" y="2958773"/>
+                  </a:lnTo>
+                  <a:lnTo>
+                    <a:pt x="3581126" y="2914088"/>
+                  </a:lnTo>
+                  <a:lnTo>
+                    <a:pt x="3509503" y="2865600"/>
+                  </a:lnTo>
+                  <a:lnTo>
+                    <a:pt x="3437881" y="2812984"/>
+                  </a:lnTo>
+                  <a:lnTo>
+                    <a:pt x="3366258" y="2755890"/>
+                  </a:lnTo>
+                  <a:lnTo>
+                    <a:pt x="3294636" y="2693936"/>
+                  </a:lnTo>
+                  <a:lnTo>
+                    <a:pt x="3223013" y="2654943"/>
+                  </a:lnTo>
+                  <a:lnTo>
+                    <a:pt x="3151391" y="2656588"/>
+                  </a:lnTo>
+                  <a:lnTo>
+                    <a:pt x="3079768" y="2658231"/>
+                  </a:lnTo>
+                  <a:lnTo>
+                    <a:pt x="3008146" y="2659870"/>
+                  </a:lnTo>
+                  <a:lnTo>
+                    <a:pt x="2936523" y="2661506"/>
+                  </a:lnTo>
+                  <a:lnTo>
+                    <a:pt x="2864901" y="2663138"/>
+                  </a:lnTo>
+                  <a:lnTo>
+                    <a:pt x="2793278" y="2664768"/>
+                  </a:lnTo>
+                  <a:lnTo>
+                    <a:pt x="2721655" y="2666394"/>
+                  </a:lnTo>
+                  <a:lnTo>
+                    <a:pt x="2650033" y="2668017"/>
+                  </a:lnTo>
+                  <a:lnTo>
+                    <a:pt x="2578410" y="2669636"/>
+                  </a:lnTo>
+                  <a:lnTo>
+                    <a:pt x="2506788" y="2671253"/>
+                  </a:lnTo>
+                  <a:lnTo>
+                    <a:pt x="2435165" y="2672866"/>
+                  </a:lnTo>
+                  <a:lnTo>
+                    <a:pt x="2363543" y="2674476"/>
+                  </a:lnTo>
+                  <a:lnTo>
+                    <a:pt x="2291920" y="2676083"/>
+                  </a:lnTo>
+                  <a:lnTo>
+                    <a:pt x="2220298" y="2677687"/>
+                  </a:lnTo>
+                  <a:lnTo>
+                    <a:pt x="2148675" y="2679287"/>
+                  </a:lnTo>
+                  <a:lnTo>
+                    <a:pt x="2077053" y="2680884"/>
+                  </a:lnTo>
+                  <a:lnTo>
+                    <a:pt x="2005430" y="2682478"/>
+                  </a:lnTo>
+                  <a:lnTo>
+                    <a:pt x="1933808" y="2684069"/>
+                  </a:lnTo>
+                  <a:lnTo>
+                    <a:pt x="1862185" y="2685657"/>
+                  </a:lnTo>
+                  <a:lnTo>
+                    <a:pt x="1790563" y="2687242"/>
+                  </a:lnTo>
+                  <a:lnTo>
+                    <a:pt x="1718940" y="2688823"/>
+                  </a:lnTo>
+                  <a:lnTo>
+                    <a:pt x="1647318" y="2690402"/>
+                  </a:lnTo>
+                  <a:lnTo>
+                    <a:pt x="1575695" y="2691977"/>
+                  </a:lnTo>
+                  <a:lnTo>
+                    <a:pt x="1504073" y="2693549"/>
+                  </a:lnTo>
+                  <a:lnTo>
+                    <a:pt x="1432450" y="2695118"/>
+                  </a:lnTo>
+                  <a:lnTo>
+                    <a:pt x="1360827" y="2696684"/>
+                  </a:lnTo>
+                  <a:lnTo>
+                    <a:pt x="1289205" y="2698247"/>
+                  </a:lnTo>
+                  <a:lnTo>
+                    <a:pt x="1217582" y="2699806"/>
+                  </a:lnTo>
+                  <a:lnTo>
+                    <a:pt x="1145960" y="2701363"/>
+                  </a:lnTo>
+                  <a:lnTo>
+                    <a:pt x="1074337" y="2702916"/>
+                  </a:lnTo>
+                  <a:lnTo>
+                    <a:pt x="1002715" y="2704467"/>
+                  </a:lnTo>
+                  <a:lnTo>
+                    <a:pt x="931092" y="2706014"/>
+                  </a:lnTo>
+                  <a:lnTo>
+                    <a:pt x="859470" y="2707558"/>
+                  </a:lnTo>
+                  <a:lnTo>
+                    <a:pt x="787847" y="2709100"/>
+                  </a:lnTo>
+                  <a:lnTo>
+                    <a:pt x="716225" y="2710638"/>
+                  </a:lnTo>
+                  <a:lnTo>
+                    <a:pt x="644602" y="2712173"/>
+                  </a:lnTo>
+                  <a:lnTo>
+                    <a:pt x="572980" y="2713705"/>
+                  </a:lnTo>
+                  <a:lnTo>
+                    <a:pt x="501357" y="2715234"/>
+                  </a:lnTo>
+                  <a:lnTo>
+                    <a:pt x="429735" y="2716760"/>
+                  </a:lnTo>
+                  <a:lnTo>
+                    <a:pt x="358112" y="2718282"/>
+                  </a:lnTo>
+                  <a:lnTo>
+                    <a:pt x="286490" y="2719802"/>
+                  </a:lnTo>
+                  <a:lnTo>
+                    <a:pt x="214867" y="2721319"/>
+                  </a:lnTo>
+                  <a:lnTo>
+                    <a:pt x="143245" y="2722833"/>
+                  </a:lnTo>
+                  <a:lnTo>
+                    <a:pt x="71622" y="2724344"/>
+                  </a:lnTo>
+                  <a:lnTo>
+                    <a:pt x="0" y="2725852"/>
                   </a:lnTo>
                   <a:close/>
                 </a:path>
@@ -4025,231 +4025,231 @@
           </p:nvSpPr>
           <p:spPr>
             <a:xfrm>
-              <a:off x="3154031" y="2073503"/>
-              <a:ext cx="5108648" cy="2652984"/>
+              <a:off x="3165902" y="2073503"/>
+              <a:ext cx="5096777" cy="2653294"/>
             </a:xfrm>
             <a:custGeom>
               <a:avLst/>
               <a:pathLst>
-                <a:path w="5108648" h="2652984">
+                <a:path w="5096777" h="2653294">
                   <a:moveTo>
                     <a:pt x="0" y="0"/>
                   </a:moveTo>
                   <a:lnTo>
-                    <a:pt x="23448" y="95193"/>
-                  </a:lnTo>
-                  <a:lnTo>
-                    <a:pt x="95071" y="362974"/>
-                  </a:lnTo>
-                  <a:lnTo>
-                    <a:pt x="166694" y="609593"/>
-                  </a:lnTo>
-                  <a:lnTo>
-                    <a:pt x="238316" y="836723"/>
-                  </a:lnTo>
-                  <a:lnTo>
-                    <a:pt x="309939" y="1045905"/>
-                  </a:lnTo>
-                  <a:lnTo>
-                    <a:pt x="381561" y="1238556"/>
-                  </a:lnTo>
-                  <a:lnTo>
-                    <a:pt x="453184" y="1415982"/>
-                  </a:lnTo>
-                  <a:lnTo>
-                    <a:pt x="524806" y="1579387"/>
-                  </a:lnTo>
-                  <a:lnTo>
-                    <a:pt x="596429" y="1729880"/>
-                  </a:lnTo>
-                  <a:lnTo>
-                    <a:pt x="668051" y="1868479"/>
-                  </a:lnTo>
-                  <a:lnTo>
-                    <a:pt x="739674" y="1996126"/>
-                  </a:lnTo>
-                  <a:lnTo>
-                    <a:pt x="811296" y="2113685"/>
-                  </a:lnTo>
-                  <a:lnTo>
-                    <a:pt x="882919" y="2221955"/>
-                  </a:lnTo>
-                  <a:lnTo>
-                    <a:pt x="954541" y="2321668"/>
-                  </a:lnTo>
-                  <a:lnTo>
-                    <a:pt x="1026164" y="2413501"/>
-                  </a:lnTo>
-                  <a:lnTo>
-                    <a:pt x="1097786" y="2498077"/>
-                  </a:lnTo>
-                  <a:lnTo>
-                    <a:pt x="1169409" y="2575970"/>
-                  </a:lnTo>
-                  <a:lnTo>
-                    <a:pt x="1241031" y="2647707"/>
-                  </a:lnTo>
-                  <a:lnTo>
-                    <a:pt x="1312654" y="2652984"/>
-                  </a:lnTo>
-                  <a:lnTo>
-                    <a:pt x="1384276" y="2651545"/>
-                  </a:lnTo>
-                  <a:lnTo>
-                    <a:pt x="1455899" y="2650104"/>
-                  </a:lnTo>
-                  <a:lnTo>
-                    <a:pt x="1527522" y="2648660"/>
-                  </a:lnTo>
-                  <a:lnTo>
-                    <a:pt x="1599144" y="2647213"/>
-                  </a:lnTo>
-                  <a:lnTo>
-                    <a:pt x="1670767" y="2645764"/>
-                  </a:lnTo>
-                  <a:lnTo>
-                    <a:pt x="1742389" y="2644313"/>
-                  </a:lnTo>
-                  <a:lnTo>
-                    <a:pt x="1814012" y="2642859"/>
-                  </a:lnTo>
-                  <a:lnTo>
-                    <a:pt x="1885634" y="2641402"/>
-                  </a:lnTo>
-                  <a:lnTo>
-                    <a:pt x="1957257" y="2639943"/>
-                  </a:lnTo>
-                  <a:lnTo>
-                    <a:pt x="2028879" y="2638482"/>
-                  </a:lnTo>
-                  <a:lnTo>
-                    <a:pt x="2100502" y="2637018"/>
-                  </a:lnTo>
-                  <a:lnTo>
-                    <a:pt x="2172124" y="2635551"/>
-                  </a:lnTo>
-                  <a:lnTo>
-                    <a:pt x="2243747" y="2634082"/>
-                  </a:lnTo>
-                  <a:lnTo>
-                    <a:pt x="2315369" y="2632610"/>
-                  </a:lnTo>
-                  <a:lnTo>
-                    <a:pt x="2386992" y="2631136"/>
-                  </a:lnTo>
-                  <a:lnTo>
-                    <a:pt x="2458614" y="2629659"/>
-                  </a:lnTo>
-                  <a:lnTo>
-                    <a:pt x="2530237" y="2628180"/>
-                  </a:lnTo>
-                  <a:lnTo>
-                    <a:pt x="2601859" y="2626698"/>
-                  </a:lnTo>
-                  <a:lnTo>
-                    <a:pt x="2673482" y="2625214"/>
-                  </a:lnTo>
-                  <a:lnTo>
-                    <a:pt x="2745104" y="2623726"/>
-                  </a:lnTo>
-                  <a:lnTo>
-                    <a:pt x="2816727" y="2622237"/>
-                  </a:lnTo>
-                  <a:lnTo>
-                    <a:pt x="2888350" y="2620745"/>
-                  </a:lnTo>
-                  <a:lnTo>
-                    <a:pt x="2959972" y="2619250"/>
-                  </a:lnTo>
-                  <a:lnTo>
-                    <a:pt x="3031595" y="2617752"/>
-                  </a:lnTo>
-                  <a:lnTo>
-                    <a:pt x="3103217" y="2616252"/>
-                  </a:lnTo>
-                  <a:lnTo>
-                    <a:pt x="3174840" y="2614750"/>
-                  </a:lnTo>
-                  <a:lnTo>
-                    <a:pt x="3246462" y="2613245"/>
-                  </a:lnTo>
-                  <a:lnTo>
-                    <a:pt x="3318085" y="2611737"/>
-                  </a:lnTo>
-                  <a:lnTo>
-                    <a:pt x="3389707" y="2610227"/>
-                  </a:lnTo>
-                  <a:lnTo>
-                    <a:pt x="3461330" y="2608714"/>
-                  </a:lnTo>
-                  <a:lnTo>
-                    <a:pt x="3532952" y="2607198"/>
-                  </a:lnTo>
-                  <a:lnTo>
-                    <a:pt x="3604575" y="2605680"/>
-                  </a:lnTo>
-                  <a:lnTo>
-                    <a:pt x="3676197" y="2604159"/>
-                  </a:lnTo>
-                  <a:lnTo>
-                    <a:pt x="3747820" y="2602635"/>
-                  </a:lnTo>
-                  <a:lnTo>
-                    <a:pt x="3819442" y="2601109"/>
-                  </a:lnTo>
-                  <a:lnTo>
-                    <a:pt x="3891065" y="2599580"/>
-                  </a:lnTo>
-                  <a:lnTo>
-                    <a:pt x="3962687" y="2598049"/>
-                  </a:lnTo>
-                  <a:lnTo>
-                    <a:pt x="4034310" y="2596515"/>
-                  </a:lnTo>
-                  <a:lnTo>
-                    <a:pt x="4105932" y="2594978"/>
-                  </a:lnTo>
-                  <a:lnTo>
-                    <a:pt x="4177555" y="2593439"/>
-                  </a:lnTo>
-                  <a:lnTo>
-                    <a:pt x="4249178" y="2591896"/>
-                  </a:lnTo>
-                  <a:lnTo>
-                    <a:pt x="4320800" y="2590352"/>
-                  </a:lnTo>
-                  <a:lnTo>
-                    <a:pt x="4392423" y="2588804"/>
-                  </a:lnTo>
-                  <a:lnTo>
-                    <a:pt x="4464045" y="2587254"/>
-                  </a:lnTo>
-                  <a:lnTo>
-                    <a:pt x="4535668" y="2585701"/>
-                  </a:lnTo>
-                  <a:lnTo>
-                    <a:pt x="4607290" y="2584146"/>
-                  </a:lnTo>
-                  <a:lnTo>
-                    <a:pt x="4678913" y="2582588"/>
-                  </a:lnTo>
-                  <a:lnTo>
-                    <a:pt x="4750535" y="2581027"/>
-                  </a:lnTo>
-                  <a:lnTo>
-                    <a:pt x="4822158" y="2579463"/>
-                  </a:lnTo>
-                  <a:lnTo>
-                    <a:pt x="4893780" y="2577897"/>
-                  </a:lnTo>
-                  <a:lnTo>
-                    <a:pt x="4965403" y="2576328"/>
-                  </a:lnTo>
-                  <a:lnTo>
-                    <a:pt x="5037025" y="2574756"/>
-                  </a:lnTo>
-                  <a:lnTo>
-                    <a:pt x="5108648" y="2573182"/>
+                    <a:pt x="11577" y="47284"/>
+                  </a:lnTo>
+                  <a:lnTo>
+                    <a:pt x="83200" y="316845"/>
+                  </a:lnTo>
+                  <a:lnTo>
+                    <a:pt x="154822" y="565262"/>
+                  </a:lnTo>
+                  <a:lnTo>
+                    <a:pt x="226445" y="794193"/>
+                  </a:lnTo>
+                  <a:lnTo>
+                    <a:pt x="298068" y="1005166"/>
+                  </a:lnTo>
+                  <a:lnTo>
+                    <a:pt x="369690" y="1199590"/>
+                  </a:lnTo>
+                  <a:lnTo>
+                    <a:pt x="441313" y="1378763"/>
+                  </a:lnTo>
+                  <a:lnTo>
+                    <a:pt x="512935" y="1543881"/>
+                  </a:lnTo>
+                  <a:lnTo>
+                    <a:pt x="584558" y="1696047"/>
+                  </a:lnTo>
+                  <a:lnTo>
+                    <a:pt x="656180" y="1836277"/>
+                  </a:lnTo>
+                  <a:lnTo>
+                    <a:pt x="727803" y="1965507"/>
+                  </a:lnTo>
+                  <a:lnTo>
+                    <a:pt x="799425" y="2084600"/>
+                  </a:lnTo>
+                  <a:lnTo>
+                    <a:pt x="871048" y="2194352"/>
+                  </a:lnTo>
+                  <a:lnTo>
+                    <a:pt x="942670" y="2295494"/>
+                  </a:lnTo>
+                  <a:lnTo>
+                    <a:pt x="1014293" y="2388702"/>
+                  </a:lnTo>
+                  <a:lnTo>
+                    <a:pt x="1085915" y="2474599"/>
+                  </a:lnTo>
+                  <a:lnTo>
+                    <a:pt x="1157538" y="2553759"/>
+                  </a:lnTo>
+                  <a:lnTo>
+                    <a:pt x="1229160" y="2626708"/>
+                  </a:lnTo>
+                  <a:lnTo>
+                    <a:pt x="1300783" y="2653294"/>
+                  </a:lnTo>
+                  <a:lnTo>
+                    <a:pt x="1372405" y="2651641"/>
+                  </a:lnTo>
+                  <a:lnTo>
+                    <a:pt x="1444028" y="2649986"/>
+                  </a:lnTo>
+                  <a:lnTo>
+                    <a:pt x="1515650" y="2648327"/>
+                  </a:lnTo>
+                  <a:lnTo>
+                    <a:pt x="1587273" y="2646665"/>
+                  </a:lnTo>
+                  <a:lnTo>
+                    <a:pt x="1658896" y="2645000"/>
+                  </a:lnTo>
+                  <a:lnTo>
+                    <a:pt x="1730518" y="2643331"/>
+                  </a:lnTo>
+                  <a:lnTo>
+                    <a:pt x="1802141" y="2641659"/>
+                  </a:lnTo>
+                  <a:lnTo>
+                    <a:pt x="1873763" y="2639984"/>
+                  </a:lnTo>
+                  <a:lnTo>
+                    <a:pt x="1945386" y="2638305"/>
+                  </a:lnTo>
+                  <a:lnTo>
+                    <a:pt x="2017008" y="2636623"/>
+                  </a:lnTo>
+                  <a:lnTo>
+                    <a:pt x="2088631" y="2634938"/>
+                  </a:lnTo>
+                  <a:lnTo>
+                    <a:pt x="2160253" y="2633249"/>
+                  </a:lnTo>
+                  <a:lnTo>
+                    <a:pt x="2231876" y="2631557"/>
+                  </a:lnTo>
+                  <a:lnTo>
+                    <a:pt x="2303498" y="2629861"/>
+                  </a:lnTo>
+                  <a:lnTo>
+                    <a:pt x="2375121" y="2628163"/>
+                  </a:lnTo>
+                  <a:lnTo>
+                    <a:pt x="2446743" y="2626460"/>
+                  </a:lnTo>
+                  <a:lnTo>
+                    <a:pt x="2518366" y="2624755"/>
+                  </a:lnTo>
+                  <a:lnTo>
+                    <a:pt x="2589988" y="2623046"/>
+                  </a:lnTo>
+                  <a:lnTo>
+                    <a:pt x="2661611" y="2621334"/>
+                  </a:lnTo>
+                  <a:lnTo>
+                    <a:pt x="2733233" y="2619618"/>
+                  </a:lnTo>
+                  <a:lnTo>
+                    <a:pt x="2804856" y="2617899"/>
+                  </a:lnTo>
+                  <a:lnTo>
+                    <a:pt x="2876478" y="2616176"/>
+                  </a:lnTo>
+                  <a:lnTo>
+                    <a:pt x="2948101" y="2614450"/>
+                  </a:lnTo>
+                  <a:lnTo>
+                    <a:pt x="3019724" y="2612720"/>
+                  </a:lnTo>
+                  <a:lnTo>
+                    <a:pt x="3091346" y="2610987"/>
+                  </a:lnTo>
+                  <a:lnTo>
+                    <a:pt x="3162969" y="2609251"/>
+                  </a:lnTo>
+                  <a:lnTo>
+                    <a:pt x="3234591" y="2607511"/>
+                  </a:lnTo>
+                  <a:lnTo>
+                    <a:pt x="3306214" y="2605768"/>
+                  </a:lnTo>
+                  <a:lnTo>
+                    <a:pt x="3377836" y="2604021"/>
+                  </a:lnTo>
+                  <a:lnTo>
+                    <a:pt x="3449459" y="2602271"/>
+                  </a:lnTo>
+                  <a:lnTo>
+                    <a:pt x="3521081" y="2600517"/>
+                  </a:lnTo>
+                  <a:lnTo>
+                    <a:pt x="3592704" y="2598760"/>
+                  </a:lnTo>
+                  <a:lnTo>
+                    <a:pt x="3664326" y="2596999"/>
+                  </a:lnTo>
+                  <a:lnTo>
+                    <a:pt x="3735949" y="2595235"/>
+                  </a:lnTo>
+                  <a:lnTo>
+                    <a:pt x="3807571" y="2593468"/>
+                  </a:lnTo>
+                  <a:lnTo>
+                    <a:pt x="3879194" y="2591696"/>
+                  </a:lnTo>
+                  <a:lnTo>
+                    <a:pt x="3950816" y="2589922"/>
+                  </a:lnTo>
+                  <a:lnTo>
+                    <a:pt x="4022439" y="2588143"/>
+                  </a:lnTo>
+                  <a:lnTo>
+                    <a:pt x="4094061" y="2586362"/>
+                  </a:lnTo>
+                  <a:lnTo>
+                    <a:pt x="4165684" y="2584576"/>
+                  </a:lnTo>
+                  <a:lnTo>
+                    <a:pt x="4237306" y="2582787"/>
+                  </a:lnTo>
+                  <a:lnTo>
+                    <a:pt x="4308929" y="2580995"/>
+                  </a:lnTo>
+                  <a:lnTo>
+                    <a:pt x="4380552" y="2579199"/>
+                  </a:lnTo>
+                  <a:lnTo>
+                    <a:pt x="4452174" y="2577399"/>
+                  </a:lnTo>
+                  <a:lnTo>
+                    <a:pt x="4523797" y="2575596"/>
+                  </a:lnTo>
+                  <a:lnTo>
+                    <a:pt x="4595419" y="2573789"/>
+                  </a:lnTo>
+                  <a:lnTo>
+                    <a:pt x="4667042" y="2571979"/>
+                  </a:lnTo>
+                  <a:lnTo>
+                    <a:pt x="4738664" y="2570165"/>
+                  </a:lnTo>
+                  <a:lnTo>
+                    <a:pt x="4810287" y="2568347"/>
+                  </a:lnTo>
+                  <a:lnTo>
+                    <a:pt x="4881909" y="2566526"/>
+                  </a:lnTo>
+                  <a:lnTo>
+                    <a:pt x="4953532" y="2564701"/>
+                  </a:lnTo>
+                  <a:lnTo>
+                    <a:pt x="5025154" y="2562873"/>
+                  </a:lnTo>
+                  <a:lnTo>
+                    <a:pt x="5096777" y="2561041"/>
                   </a:lnTo>
                 </a:path>
               </a:pathLst>
@@ -4269,312 +4269,312 @@
           </p:nvSpPr>
           <p:spPr>
             <a:xfrm>
-              <a:off x="1172049" y="4727924"/>
-              <a:ext cx="7090630" cy="819517"/>
+              <a:off x="1172049" y="4728446"/>
+              <a:ext cx="7090630" cy="818399"/>
             </a:xfrm>
             <a:custGeom>
               <a:avLst/>
               <a:pathLst>
-                <a:path w="7090630" h="819517">
+                <a:path w="7090630" h="818399">
                   <a:moveTo>
-                    <a:pt x="7090630" y="819517"/>
+                    <a:pt x="7090630" y="818399"/>
                   </a:moveTo>
                   <a:lnTo>
-                    <a:pt x="7019007" y="818675"/>
-                  </a:lnTo>
-                  <a:lnTo>
-                    <a:pt x="6947385" y="817761"/>
-                  </a:lnTo>
-                  <a:lnTo>
-                    <a:pt x="6875762" y="816769"/>
-                  </a:lnTo>
-                  <a:lnTo>
-                    <a:pt x="6804139" y="815692"/>
-                  </a:lnTo>
-                  <a:lnTo>
-                    <a:pt x="6732517" y="814522"/>
-                  </a:lnTo>
-                  <a:lnTo>
-                    <a:pt x="6660894" y="813252"/>
-                  </a:lnTo>
-                  <a:lnTo>
-                    <a:pt x="6589272" y="811872"/>
-                  </a:lnTo>
-                  <a:lnTo>
-                    <a:pt x="6517649" y="810375"/>
-                  </a:lnTo>
-                  <a:lnTo>
-                    <a:pt x="6446027" y="808749"/>
-                  </a:lnTo>
-                  <a:lnTo>
-                    <a:pt x="6374404" y="806983"/>
-                  </a:lnTo>
-                  <a:lnTo>
-                    <a:pt x="6302782" y="805066"/>
-                  </a:lnTo>
-                  <a:lnTo>
-                    <a:pt x="6231159" y="802984"/>
-                  </a:lnTo>
-                  <a:lnTo>
-                    <a:pt x="6159537" y="800724"/>
-                  </a:lnTo>
-                  <a:lnTo>
-                    <a:pt x="6087914" y="798270"/>
-                  </a:lnTo>
-                  <a:lnTo>
-                    <a:pt x="6016292" y="795605"/>
-                  </a:lnTo>
-                  <a:lnTo>
-                    <a:pt x="5944669" y="792712"/>
-                  </a:lnTo>
-                  <a:lnTo>
-                    <a:pt x="5873047" y="789570"/>
-                  </a:lnTo>
-                  <a:lnTo>
-                    <a:pt x="5801424" y="786159"/>
-                  </a:lnTo>
-                  <a:lnTo>
-                    <a:pt x="5729802" y="782455"/>
-                  </a:lnTo>
-                  <a:lnTo>
-                    <a:pt x="5658179" y="778433"/>
-                  </a:lnTo>
-                  <a:lnTo>
-                    <a:pt x="5586557" y="774066"/>
-                  </a:lnTo>
-                  <a:lnTo>
-                    <a:pt x="5514934" y="769325"/>
-                  </a:lnTo>
-                  <a:lnTo>
-                    <a:pt x="5443311" y="764176"/>
-                  </a:lnTo>
-                  <a:lnTo>
-                    <a:pt x="5371689" y="758586"/>
-                  </a:lnTo>
-                  <a:lnTo>
-                    <a:pt x="5300066" y="752516"/>
-                  </a:lnTo>
-                  <a:lnTo>
-                    <a:pt x="5228444" y="745926"/>
-                  </a:lnTo>
-                  <a:lnTo>
-                    <a:pt x="5156821" y="738769"/>
-                  </a:lnTo>
-                  <a:lnTo>
-                    <a:pt x="5085199" y="730999"/>
-                  </a:lnTo>
-                  <a:lnTo>
-                    <a:pt x="5013576" y="722562"/>
-                  </a:lnTo>
-                  <a:lnTo>
-                    <a:pt x="4941954" y="713401"/>
-                  </a:lnTo>
-                  <a:lnTo>
-                    <a:pt x="4870331" y="703454"/>
-                  </a:lnTo>
-                  <a:lnTo>
-                    <a:pt x="4798709" y="692654"/>
-                  </a:lnTo>
-                  <a:lnTo>
-                    <a:pt x="4727086" y="680927"/>
-                  </a:lnTo>
-                  <a:lnTo>
-                    <a:pt x="4655464" y="668193"/>
-                  </a:lnTo>
-                  <a:lnTo>
-                    <a:pt x="4583841" y="654367"/>
-                  </a:lnTo>
-                  <a:lnTo>
-                    <a:pt x="4512219" y="639355"/>
-                  </a:lnTo>
-                  <a:lnTo>
-                    <a:pt x="4440596" y="623054"/>
-                  </a:lnTo>
-                  <a:lnTo>
-                    <a:pt x="4368974" y="605355"/>
-                  </a:lnTo>
-                  <a:lnTo>
-                    <a:pt x="4297351" y="586137"/>
-                  </a:lnTo>
-                  <a:lnTo>
-                    <a:pt x="4225729" y="565270"/>
-                  </a:lnTo>
-                  <a:lnTo>
-                    <a:pt x="4154106" y="542612"/>
-                  </a:lnTo>
-                  <a:lnTo>
-                    <a:pt x="4082483" y="518010"/>
-                  </a:lnTo>
-                  <a:lnTo>
-                    <a:pt x="4010861" y="491298"/>
-                  </a:lnTo>
-                  <a:lnTo>
-                    <a:pt x="3939238" y="462293"/>
-                  </a:lnTo>
-                  <a:lnTo>
-                    <a:pt x="3867616" y="430799"/>
-                  </a:lnTo>
-                  <a:lnTo>
-                    <a:pt x="3795993" y="396603"/>
-                  </a:lnTo>
-                  <a:lnTo>
-                    <a:pt x="3724371" y="359473"/>
-                  </a:lnTo>
-                  <a:lnTo>
-                    <a:pt x="3652748" y="319157"/>
-                  </a:lnTo>
-                  <a:lnTo>
-                    <a:pt x="3581126" y="275382"/>
-                  </a:lnTo>
-                  <a:lnTo>
-                    <a:pt x="3509503" y="227850"/>
-                  </a:lnTo>
-                  <a:lnTo>
-                    <a:pt x="3437881" y="176240"/>
-                  </a:lnTo>
-                  <a:lnTo>
-                    <a:pt x="3366258" y="120201"/>
-                  </a:lnTo>
-                  <a:lnTo>
-                    <a:pt x="3294636" y="59354"/>
+                    <a:pt x="7019007" y="817513"/>
+                  </a:lnTo>
+                  <a:lnTo>
+                    <a:pt x="6947385" y="816552"/>
+                  </a:lnTo>
+                  <a:lnTo>
+                    <a:pt x="6875762" y="815509"/>
+                  </a:lnTo>
+                  <a:lnTo>
+                    <a:pt x="6804139" y="814377"/>
+                  </a:lnTo>
+                  <a:lnTo>
+                    <a:pt x="6732517" y="813150"/>
+                  </a:lnTo>
+                  <a:lnTo>
+                    <a:pt x="6660894" y="811817"/>
+                  </a:lnTo>
+                  <a:lnTo>
+                    <a:pt x="6589272" y="810371"/>
+                  </a:lnTo>
+                  <a:lnTo>
+                    <a:pt x="6517649" y="808802"/>
+                  </a:lnTo>
+                  <a:lnTo>
+                    <a:pt x="6446027" y="807100"/>
+                  </a:lnTo>
+                  <a:lnTo>
+                    <a:pt x="6374404" y="805253"/>
+                  </a:lnTo>
+                  <a:lnTo>
+                    <a:pt x="6302782" y="803248"/>
+                  </a:lnTo>
+                  <a:lnTo>
+                    <a:pt x="6231159" y="801073"/>
+                  </a:lnTo>
+                  <a:lnTo>
+                    <a:pt x="6159537" y="798712"/>
+                  </a:lnTo>
+                  <a:lnTo>
+                    <a:pt x="6087914" y="796151"/>
+                  </a:lnTo>
+                  <a:lnTo>
+                    <a:pt x="6016292" y="793372"/>
+                  </a:lnTo>
+                  <a:lnTo>
+                    <a:pt x="5944669" y="790356"/>
+                  </a:lnTo>
+                  <a:lnTo>
+                    <a:pt x="5873047" y="787083"/>
+                  </a:lnTo>
+                  <a:lnTo>
+                    <a:pt x="5801424" y="783532"/>
+                  </a:lnTo>
+                  <a:lnTo>
+                    <a:pt x="5729802" y="779679"/>
+                  </a:lnTo>
+                  <a:lnTo>
+                    <a:pt x="5658179" y="775497"/>
+                  </a:lnTo>
+                  <a:lnTo>
+                    <a:pt x="5586557" y="770960"/>
+                  </a:lnTo>
+                  <a:lnTo>
+                    <a:pt x="5514934" y="766036"/>
+                  </a:lnTo>
+                  <a:lnTo>
+                    <a:pt x="5443311" y="760694"/>
+                  </a:lnTo>
+                  <a:lnTo>
+                    <a:pt x="5371689" y="754896"/>
+                  </a:lnTo>
+                  <a:lnTo>
+                    <a:pt x="5300066" y="748605"/>
+                  </a:lnTo>
+                  <a:lnTo>
+                    <a:pt x="5228444" y="741779"/>
+                  </a:lnTo>
+                  <a:lnTo>
+                    <a:pt x="5156821" y="734372"/>
+                  </a:lnTo>
+                  <a:lnTo>
+                    <a:pt x="5085199" y="726334"/>
+                  </a:lnTo>
+                  <a:lnTo>
+                    <a:pt x="5013576" y="717612"/>
+                  </a:lnTo>
+                  <a:lnTo>
+                    <a:pt x="4941954" y="708147"/>
+                  </a:lnTo>
+                  <a:lnTo>
+                    <a:pt x="4870331" y="697877"/>
+                  </a:lnTo>
+                  <a:lnTo>
+                    <a:pt x="4798709" y="686733"/>
+                  </a:lnTo>
+                  <a:lnTo>
+                    <a:pt x="4727086" y="674640"/>
+                  </a:lnTo>
+                  <a:lnTo>
+                    <a:pt x="4655464" y="661518"/>
+                  </a:lnTo>
+                  <a:lnTo>
+                    <a:pt x="4583841" y="647279"/>
+                  </a:lnTo>
+                  <a:lnTo>
+                    <a:pt x="4512219" y="631828"/>
+                  </a:lnTo>
+                  <a:lnTo>
+                    <a:pt x="4440596" y="615062"/>
+                  </a:lnTo>
+                  <a:lnTo>
+                    <a:pt x="4368974" y="596869"/>
+                  </a:lnTo>
+                  <a:lnTo>
+                    <a:pt x="4297351" y="577127"/>
+                  </a:lnTo>
+                  <a:lnTo>
+                    <a:pt x="4225729" y="555704"/>
+                  </a:lnTo>
+                  <a:lnTo>
+                    <a:pt x="4154106" y="532459"/>
+                  </a:lnTo>
+                  <a:lnTo>
+                    <a:pt x="4082483" y="507234"/>
+                  </a:lnTo>
+                  <a:lnTo>
+                    <a:pt x="4010861" y="479863"/>
+                  </a:lnTo>
+                  <a:lnTo>
+                    <a:pt x="3939238" y="450161"/>
+                  </a:lnTo>
+                  <a:lnTo>
+                    <a:pt x="3867616" y="417932"/>
+                  </a:lnTo>
+                  <a:lnTo>
+                    <a:pt x="3795993" y="382959"/>
+                  </a:lnTo>
+                  <a:lnTo>
+                    <a:pt x="3724371" y="345010"/>
+                  </a:lnTo>
+                  <a:lnTo>
+                    <a:pt x="3652748" y="303830"/>
+                  </a:lnTo>
+                  <a:lnTo>
+                    <a:pt x="3581126" y="259145"/>
+                  </a:lnTo>
+                  <a:lnTo>
+                    <a:pt x="3509503" y="210657"/>
+                  </a:lnTo>
+                  <a:lnTo>
+                    <a:pt x="3437881" y="158041"/>
+                  </a:lnTo>
+                  <a:lnTo>
+                    <a:pt x="3366258" y="100947"/>
+                  </a:lnTo>
+                  <a:lnTo>
+                    <a:pt x="3294636" y="38993"/>
                   </a:lnTo>
                   <a:lnTo>
                     <a:pt x="3223013" y="0"/>
                   </a:lnTo>
                   <a:lnTo>
-                    <a:pt x="3151391" y="1433"/>
-                  </a:lnTo>
-                  <a:lnTo>
-                    <a:pt x="3079768" y="2865"/>
-                  </a:lnTo>
-                  <a:lnTo>
-                    <a:pt x="3008146" y="4294"/>
-                  </a:lnTo>
-                  <a:lnTo>
-                    <a:pt x="2936523" y="5721"/>
-                  </a:lnTo>
-                  <a:lnTo>
-                    <a:pt x="2864901" y="7145"/>
-                  </a:lnTo>
-                  <a:lnTo>
-                    <a:pt x="2793278" y="8566"/>
-                  </a:lnTo>
-                  <a:lnTo>
-                    <a:pt x="2721655" y="9985"/>
-                  </a:lnTo>
-                  <a:lnTo>
-                    <a:pt x="2650033" y="11402"/>
-                  </a:lnTo>
-                  <a:lnTo>
-                    <a:pt x="2578410" y="12816"/>
-                  </a:lnTo>
-                  <a:lnTo>
-                    <a:pt x="2506788" y="14228"/>
-                  </a:lnTo>
-                  <a:lnTo>
-                    <a:pt x="2435165" y="15638"/>
-                  </a:lnTo>
-                  <a:lnTo>
-                    <a:pt x="2363543" y="17045"/>
-                  </a:lnTo>
-                  <a:lnTo>
-                    <a:pt x="2291920" y="18449"/>
-                  </a:lnTo>
-                  <a:lnTo>
-                    <a:pt x="2220298" y="19851"/>
-                  </a:lnTo>
-                  <a:lnTo>
-                    <a:pt x="2148675" y="21251"/>
-                  </a:lnTo>
-                  <a:lnTo>
-                    <a:pt x="2077053" y="22648"/>
-                  </a:lnTo>
-                  <a:lnTo>
-                    <a:pt x="2005430" y="24043"/>
-                  </a:lnTo>
-                  <a:lnTo>
-                    <a:pt x="1933808" y="25435"/>
-                  </a:lnTo>
-                  <a:lnTo>
-                    <a:pt x="1862185" y="26825"/>
-                  </a:lnTo>
-                  <a:lnTo>
-                    <a:pt x="1790563" y="28213"/>
-                  </a:lnTo>
-                  <a:lnTo>
-                    <a:pt x="1718940" y="29598"/>
-                  </a:lnTo>
-                  <a:lnTo>
-                    <a:pt x="1647318" y="30981"/>
-                  </a:lnTo>
-                  <a:lnTo>
-                    <a:pt x="1575695" y="32361"/>
-                  </a:lnTo>
-                  <a:lnTo>
-                    <a:pt x="1504073" y="33739"/>
-                  </a:lnTo>
-                  <a:lnTo>
-                    <a:pt x="1432450" y="35115"/>
-                  </a:lnTo>
-                  <a:lnTo>
-                    <a:pt x="1360827" y="36488"/>
-                  </a:lnTo>
-                  <a:lnTo>
-                    <a:pt x="1289205" y="37859"/>
-                  </a:lnTo>
-                  <a:lnTo>
-                    <a:pt x="1217582" y="39228"/>
-                  </a:lnTo>
-                  <a:lnTo>
-                    <a:pt x="1145960" y="40594"/>
-                  </a:lnTo>
-                  <a:lnTo>
-                    <a:pt x="1074337" y="41958"/>
-                  </a:lnTo>
-                  <a:lnTo>
-                    <a:pt x="1002715" y="43319"/>
-                  </a:lnTo>
-                  <a:lnTo>
-                    <a:pt x="931092" y="44678"/>
-                  </a:lnTo>
-                  <a:lnTo>
-                    <a:pt x="859470" y="46035"/>
-                  </a:lnTo>
-                  <a:lnTo>
-                    <a:pt x="787847" y="47389"/>
-                  </a:lnTo>
-                  <a:lnTo>
-                    <a:pt x="716225" y="48741"/>
-                  </a:lnTo>
-                  <a:lnTo>
-                    <a:pt x="644602" y="50091"/>
-                  </a:lnTo>
-                  <a:lnTo>
-                    <a:pt x="572980" y="51438"/>
-                  </a:lnTo>
-                  <a:lnTo>
-                    <a:pt x="501357" y="52783"/>
-                  </a:lnTo>
-                  <a:lnTo>
-                    <a:pt x="429735" y="54126"/>
-                  </a:lnTo>
-                  <a:lnTo>
-                    <a:pt x="358112" y="55466"/>
-                  </a:lnTo>
-                  <a:lnTo>
-                    <a:pt x="286490" y="56805"/>
-                  </a:lnTo>
-                  <a:lnTo>
-                    <a:pt x="214867" y="58140"/>
-                  </a:lnTo>
-                  <a:lnTo>
-                    <a:pt x="143245" y="59474"/>
-                  </a:lnTo>
-                  <a:lnTo>
-                    <a:pt x="71622" y="60805"/>
-                  </a:lnTo>
-                  <a:lnTo>
-                    <a:pt x="0" y="62134"/>
+                    <a:pt x="3151391" y="1645"/>
+                  </a:lnTo>
+                  <a:lnTo>
+                    <a:pt x="3079768" y="3288"/>
+                  </a:lnTo>
+                  <a:lnTo>
+                    <a:pt x="3008146" y="4927"/>
+                  </a:lnTo>
+                  <a:lnTo>
+                    <a:pt x="2936523" y="6562"/>
+                  </a:lnTo>
+                  <a:lnTo>
+                    <a:pt x="2864901" y="8195"/>
+                  </a:lnTo>
+                  <a:lnTo>
+                    <a:pt x="2793278" y="9824"/>
+                  </a:lnTo>
+                  <a:lnTo>
+                    <a:pt x="2721655" y="11451"/>
+                  </a:lnTo>
+                  <a:lnTo>
+                    <a:pt x="2650033" y="13073"/>
+                  </a:lnTo>
+                  <a:lnTo>
+                    <a:pt x="2578410" y="14693"/>
+                  </a:lnTo>
+                  <a:lnTo>
+                    <a:pt x="2506788" y="16310"/>
+                  </a:lnTo>
+                  <a:lnTo>
+                    <a:pt x="2435165" y="17923"/>
+                  </a:lnTo>
+                  <a:lnTo>
+                    <a:pt x="2363543" y="19533"/>
+                  </a:lnTo>
+                  <a:lnTo>
+                    <a:pt x="2291920" y="21140"/>
+                  </a:lnTo>
+                  <a:lnTo>
+                    <a:pt x="2220298" y="22743"/>
+                  </a:lnTo>
+                  <a:lnTo>
+                    <a:pt x="2148675" y="24344"/>
+                  </a:lnTo>
+                  <a:lnTo>
+                    <a:pt x="2077053" y="25941"/>
+                  </a:lnTo>
+                  <a:lnTo>
+                    <a:pt x="2005430" y="27535"/>
+                  </a:lnTo>
+                  <a:lnTo>
+                    <a:pt x="1933808" y="29126"/>
+                  </a:lnTo>
+                  <a:lnTo>
+                    <a:pt x="1862185" y="30714"/>
+                  </a:lnTo>
+                  <a:lnTo>
+                    <a:pt x="1790563" y="32299"/>
+                  </a:lnTo>
+                  <a:lnTo>
+                    <a:pt x="1718940" y="33880"/>
+                  </a:lnTo>
+                  <a:lnTo>
+                    <a:pt x="1647318" y="35459"/>
+                  </a:lnTo>
+                  <a:lnTo>
+                    <a:pt x="1575695" y="37034"/>
+                  </a:lnTo>
+                  <a:lnTo>
+                    <a:pt x="1504073" y="38606"/>
+                  </a:lnTo>
+                  <a:lnTo>
+                    <a:pt x="1432450" y="40175"/>
+                  </a:lnTo>
+                  <a:lnTo>
+                    <a:pt x="1360827" y="41741"/>
+                  </a:lnTo>
+                  <a:lnTo>
+                    <a:pt x="1289205" y="43304"/>
+                  </a:lnTo>
+                  <a:lnTo>
+                    <a:pt x="1217582" y="44863"/>
+                  </a:lnTo>
+                  <a:lnTo>
+                    <a:pt x="1145960" y="46420"/>
+                  </a:lnTo>
+                  <a:lnTo>
+                    <a:pt x="1074337" y="47973"/>
+                  </a:lnTo>
+                  <a:lnTo>
+                    <a:pt x="1002715" y="49524"/>
+                  </a:lnTo>
+                  <a:lnTo>
+                    <a:pt x="931092" y="51071"/>
+                  </a:lnTo>
+                  <a:lnTo>
+                    <a:pt x="859470" y="52615"/>
+                  </a:lnTo>
+                  <a:lnTo>
+                    <a:pt x="787847" y="54156"/>
+                  </a:lnTo>
+                  <a:lnTo>
+                    <a:pt x="716225" y="55695"/>
+                  </a:lnTo>
+                  <a:lnTo>
+                    <a:pt x="644602" y="57230"/>
+                  </a:lnTo>
+                  <a:lnTo>
+                    <a:pt x="572980" y="58762"/>
+                  </a:lnTo>
+                  <a:lnTo>
+                    <a:pt x="501357" y="60291"/>
+                  </a:lnTo>
+                  <a:lnTo>
+                    <a:pt x="429735" y="61816"/>
+                  </a:lnTo>
+                  <a:lnTo>
+                    <a:pt x="358112" y="63339"/>
+                  </a:lnTo>
+                  <a:lnTo>
+                    <a:pt x="286490" y="64859"/>
+                  </a:lnTo>
+                  <a:lnTo>
+                    <a:pt x="214867" y="66376"/>
+                  </a:lnTo>
+                  <a:lnTo>
+                    <a:pt x="143245" y="67890"/>
+                  </a:lnTo>
+                  <a:lnTo>
+                    <a:pt x="71622" y="69401"/>
+                  </a:lnTo>
+                  <a:lnTo>
+                    <a:pt x="0" y="70909"/>
                   </a:lnTo>
                 </a:path>
               </a:pathLst>
@@ -4594,285 +4594,285 @@
           </p:nvSpPr>
           <p:spPr>
             <a:xfrm>
-              <a:off x="1851557" y="2073503"/>
-              <a:ext cx="6411122" cy="3389241"/>
+              <a:off x="1844846" y="2073503"/>
+              <a:ext cx="6417833" cy="3385764"/>
             </a:xfrm>
             <a:custGeom>
               <a:avLst/>
               <a:pathLst>
-                <a:path w="6411122" h="3389241">
+                <a:path w="6417833" h="3385764">
                   <a:moveTo>
                     <a:pt x="0" y="0"/>
                   </a:moveTo>
                   <a:lnTo>
-                    <a:pt x="36717" y="71919"/>
-                  </a:lnTo>
-                  <a:lnTo>
-                    <a:pt x="108339" y="206669"/>
-                  </a:lnTo>
-                  <a:lnTo>
-                    <a:pt x="179962" y="336097"/>
-                  </a:lnTo>
-                  <a:lnTo>
-                    <a:pt x="251584" y="460413"/>
-                  </a:lnTo>
-                  <a:lnTo>
-                    <a:pt x="323207" y="579819"/>
-                  </a:lnTo>
-                  <a:lnTo>
-                    <a:pt x="394829" y="694509"/>
-                  </a:lnTo>
-                  <a:lnTo>
-                    <a:pt x="466452" y="804670"/>
-                  </a:lnTo>
-                  <a:lnTo>
-                    <a:pt x="538074" y="910480"/>
-                  </a:lnTo>
-                  <a:lnTo>
-                    <a:pt x="609697" y="1012111"/>
-                  </a:lnTo>
-                  <a:lnTo>
-                    <a:pt x="681319" y="1109728"/>
-                  </a:lnTo>
-                  <a:lnTo>
-                    <a:pt x="752942" y="1203489"/>
-                  </a:lnTo>
-                  <a:lnTo>
-                    <a:pt x="824564" y="1293548"/>
-                  </a:lnTo>
-                  <a:lnTo>
-                    <a:pt x="896187" y="1380049"/>
-                  </a:lnTo>
-                  <a:lnTo>
-                    <a:pt x="967810" y="1463135"/>
-                  </a:lnTo>
-                  <a:lnTo>
-                    <a:pt x="1039432" y="1542938"/>
-                  </a:lnTo>
-                  <a:lnTo>
-                    <a:pt x="1111055" y="1619590"/>
-                  </a:lnTo>
-                  <a:lnTo>
-                    <a:pt x="1182677" y="1693215"/>
-                  </a:lnTo>
-                  <a:lnTo>
-                    <a:pt x="1254300" y="1763932"/>
-                  </a:lnTo>
-                  <a:lnTo>
-                    <a:pt x="1325922" y="1831856"/>
-                  </a:lnTo>
-                  <a:lnTo>
-                    <a:pt x="1397545" y="1897097"/>
-                  </a:lnTo>
-                  <a:lnTo>
-                    <a:pt x="1469167" y="1959761"/>
-                  </a:lnTo>
-                  <a:lnTo>
-                    <a:pt x="1540790" y="2019951"/>
-                  </a:lnTo>
-                  <a:lnTo>
-                    <a:pt x="1612412" y="2077763"/>
-                  </a:lnTo>
-                  <a:lnTo>
-                    <a:pt x="1684035" y="2133293"/>
-                  </a:lnTo>
-                  <a:lnTo>
-                    <a:pt x="1755657" y="2186629"/>
-                  </a:lnTo>
-                  <a:lnTo>
-                    <a:pt x="1827280" y="2237858"/>
-                  </a:lnTo>
-                  <a:lnTo>
-                    <a:pt x="1898902" y="2287064"/>
-                  </a:lnTo>
-                  <a:lnTo>
-                    <a:pt x="1970525" y="2334327"/>
-                  </a:lnTo>
-                  <a:lnTo>
-                    <a:pt x="2042147" y="2379723"/>
-                  </a:lnTo>
-                  <a:lnTo>
-                    <a:pt x="2113770" y="2423327"/>
-                  </a:lnTo>
-                  <a:lnTo>
-                    <a:pt x="2185392" y="2465208"/>
-                  </a:lnTo>
-                  <a:lnTo>
-                    <a:pt x="2257015" y="2505435"/>
-                  </a:lnTo>
-                  <a:lnTo>
-                    <a:pt x="2328638" y="2544073"/>
-                  </a:lnTo>
-                  <a:lnTo>
-                    <a:pt x="2400260" y="2581185"/>
-                  </a:lnTo>
-                  <a:lnTo>
-                    <a:pt x="2471883" y="2616832"/>
-                  </a:lnTo>
-                  <a:lnTo>
-                    <a:pt x="2543505" y="2651071"/>
-                  </a:lnTo>
-                  <a:lnTo>
-                    <a:pt x="2615128" y="2683957"/>
-                  </a:lnTo>
-                  <a:lnTo>
-                    <a:pt x="2686750" y="2715545"/>
-                  </a:lnTo>
-                  <a:lnTo>
-                    <a:pt x="2758373" y="2745885"/>
-                  </a:lnTo>
-                  <a:lnTo>
-                    <a:pt x="2829995" y="2775026"/>
-                  </a:lnTo>
-                  <a:lnTo>
-                    <a:pt x="2901618" y="2803017"/>
-                  </a:lnTo>
-                  <a:lnTo>
-                    <a:pt x="2973240" y="2829903"/>
-                  </a:lnTo>
-                  <a:lnTo>
-                    <a:pt x="3044863" y="2855726"/>
-                  </a:lnTo>
-                  <a:lnTo>
-                    <a:pt x="3116485" y="2880530"/>
-                  </a:lnTo>
-                  <a:lnTo>
-                    <a:pt x="3188108" y="2904354"/>
-                  </a:lnTo>
-                  <a:lnTo>
-                    <a:pt x="3259730" y="2927237"/>
-                  </a:lnTo>
-                  <a:lnTo>
-                    <a:pt x="3331353" y="2949216"/>
-                  </a:lnTo>
-                  <a:lnTo>
-                    <a:pt x="3402975" y="2970327"/>
-                  </a:lnTo>
-                  <a:lnTo>
-                    <a:pt x="3474598" y="2990605"/>
-                  </a:lnTo>
-                  <a:lnTo>
-                    <a:pt x="3546220" y="3010081"/>
-                  </a:lnTo>
-                  <a:lnTo>
-                    <a:pt x="3617843" y="3028789"/>
-                  </a:lnTo>
-                  <a:lnTo>
-                    <a:pt x="3689466" y="3046757"/>
-                  </a:lnTo>
-                  <a:lnTo>
-                    <a:pt x="3761088" y="3064016"/>
-                  </a:lnTo>
-                  <a:lnTo>
-                    <a:pt x="3832711" y="3080593"/>
-                  </a:lnTo>
-                  <a:lnTo>
-                    <a:pt x="3904333" y="3096516"/>
-                  </a:lnTo>
-                  <a:lnTo>
-                    <a:pt x="3975956" y="3111809"/>
-                  </a:lnTo>
-                  <a:lnTo>
-                    <a:pt x="4047578" y="3126499"/>
-                  </a:lnTo>
-                  <a:lnTo>
-                    <a:pt x="4119201" y="3140608"/>
-                  </a:lnTo>
-                  <a:lnTo>
-                    <a:pt x="4190823" y="3154161"/>
-                  </a:lnTo>
-                  <a:lnTo>
-                    <a:pt x="4262446" y="3167177"/>
-                  </a:lnTo>
-                  <a:lnTo>
-                    <a:pt x="4334068" y="3179680"/>
-                  </a:lnTo>
-                  <a:lnTo>
-                    <a:pt x="4405691" y="3191689"/>
-                  </a:lnTo>
-                  <a:lnTo>
-                    <a:pt x="4477313" y="3203224"/>
-                  </a:lnTo>
-                  <a:lnTo>
-                    <a:pt x="4548936" y="3214303"/>
-                  </a:lnTo>
-                  <a:lnTo>
-                    <a:pt x="4620558" y="3224945"/>
-                  </a:lnTo>
-                  <a:lnTo>
-                    <a:pt x="4692181" y="3235166"/>
-                  </a:lnTo>
-                  <a:lnTo>
-                    <a:pt x="4763803" y="3244984"/>
-                  </a:lnTo>
-                  <a:lnTo>
-                    <a:pt x="4835426" y="3254414"/>
-                  </a:lnTo>
-                  <a:lnTo>
-                    <a:pt x="4907048" y="3263471"/>
-                  </a:lnTo>
-                  <a:lnTo>
-                    <a:pt x="4978671" y="3272171"/>
-                  </a:lnTo>
-                  <a:lnTo>
-                    <a:pt x="5050294" y="3280527"/>
-                  </a:lnTo>
-                  <a:lnTo>
-                    <a:pt x="5121916" y="3288553"/>
-                  </a:lnTo>
-                  <a:lnTo>
-                    <a:pt x="5193539" y="3296262"/>
-                  </a:lnTo>
-                  <a:lnTo>
-                    <a:pt x="5265161" y="3303667"/>
-                  </a:lnTo>
-                  <a:lnTo>
-                    <a:pt x="5336784" y="3310779"/>
-                  </a:lnTo>
-                  <a:lnTo>
-                    <a:pt x="5408406" y="3317611"/>
-                  </a:lnTo>
-                  <a:lnTo>
-                    <a:pt x="5480029" y="3324172"/>
-                  </a:lnTo>
-                  <a:lnTo>
-                    <a:pt x="5551651" y="3330474"/>
-                  </a:lnTo>
-                  <a:lnTo>
-                    <a:pt x="5623274" y="3336528"/>
-                  </a:lnTo>
-                  <a:lnTo>
-                    <a:pt x="5694896" y="3342342"/>
-                  </a:lnTo>
-                  <a:lnTo>
-                    <a:pt x="5766519" y="3347927"/>
-                  </a:lnTo>
-                  <a:lnTo>
-                    <a:pt x="5838141" y="3353291"/>
-                  </a:lnTo>
-                  <a:lnTo>
-                    <a:pt x="5909764" y="3358444"/>
-                  </a:lnTo>
-                  <a:lnTo>
-                    <a:pt x="5981386" y="3363392"/>
-                  </a:lnTo>
-                  <a:lnTo>
-                    <a:pt x="6053009" y="3368146"/>
-                  </a:lnTo>
-                  <a:lnTo>
-                    <a:pt x="6124631" y="3372711"/>
-                  </a:lnTo>
-                  <a:lnTo>
-                    <a:pt x="6196254" y="3377097"/>
-                  </a:lnTo>
-                  <a:lnTo>
-                    <a:pt x="6267876" y="3381309"/>
-                  </a:lnTo>
-                  <a:lnTo>
-                    <a:pt x="6339499" y="3385355"/>
-                  </a:lnTo>
-                  <a:lnTo>
-                    <a:pt x="6411122" y="3389241"/>
+                    <a:pt x="43428" y="83813"/>
+                  </a:lnTo>
+                  <a:lnTo>
+                    <a:pt x="115050" y="216639"/>
+                  </a:lnTo>
+                  <a:lnTo>
+                    <a:pt x="186673" y="344275"/>
+                  </a:lnTo>
+                  <a:lnTo>
+                    <a:pt x="258295" y="466926"/>
+                  </a:lnTo>
+                  <a:lnTo>
+                    <a:pt x="329918" y="584785"/>
+                  </a:lnTo>
+                  <a:lnTo>
+                    <a:pt x="401540" y="698039"/>
+                  </a:lnTo>
+                  <a:lnTo>
+                    <a:pt x="473163" y="806869"/>
+                  </a:lnTo>
+                  <a:lnTo>
+                    <a:pt x="544785" y="911447"/>
+                  </a:lnTo>
+                  <a:lnTo>
+                    <a:pt x="616408" y="1011939"/>
+                  </a:lnTo>
+                  <a:lnTo>
+                    <a:pt x="688031" y="1108506"/>
+                  </a:lnTo>
+                  <a:lnTo>
+                    <a:pt x="759653" y="1201300"/>
+                  </a:lnTo>
+                  <a:lnTo>
+                    <a:pt x="831276" y="1290469"/>
+                  </a:lnTo>
+                  <a:lnTo>
+                    <a:pt x="902898" y="1376154"/>
+                  </a:lnTo>
+                  <a:lnTo>
+                    <a:pt x="974521" y="1458492"/>
+                  </a:lnTo>
+                  <a:lnTo>
+                    <a:pt x="1046143" y="1537613"/>
+                  </a:lnTo>
+                  <a:lnTo>
+                    <a:pt x="1117766" y="1613643"/>
+                  </a:lnTo>
+                  <a:lnTo>
+                    <a:pt x="1189388" y="1686703"/>
+                  </a:lnTo>
+                  <a:lnTo>
+                    <a:pt x="1261011" y="1756908"/>
+                  </a:lnTo>
+                  <a:lnTo>
+                    <a:pt x="1332633" y="1824371"/>
+                  </a:lnTo>
+                  <a:lnTo>
+                    <a:pt x="1404256" y="1889198"/>
+                  </a:lnTo>
+                  <a:lnTo>
+                    <a:pt x="1475878" y="1951493"/>
+                  </a:lnTo>
+                  <a:lnTo>
+                    <a:pt x="1547501" y="2011353"/>
+                  </a:lnTo>
+                  <a:lnTo>
+                    <a:pt x="1619123" y="2068876"/>
+                  </a:lnTo>
+                  <a:lnTo>
+                    <a:pt x="1690746" y="2124151"/>
+                  </a:lnTo>
+                  <a:lnTo>
+                    <a:pt x="1762368" y="2177266"/>
+                  </a:lnTo>
+                  <a:lnTo>
+                    <a:pt x="1833991" y="2228307"/>
+                  </a:lnTo>
+                  <a:lnTo>
+                    <a:pt x="1905613" y="2277353"/>
+                  </a:lnTo>
+                  <a:lnTo>
+                    <a:pt x="1977236" y="2324484"/>
+                  </a:lnTo>
+                  <a:lnTo>
+                    <a:pt x="2048859" y="2369773"/>
+                  </a:lnTo>
+                  <a:lnTo>
+                    <a:pt x="2120481" y="2413293"/>
+                  </a:lnTo>
+                  <a:lnTo>
+                    <a:pt x="2192104" y="2455112"/>
+                  </a:lnTo>
+                  <a:lnTo>
+                    <a:pt x="2263726" y="2495298"/>
+                  </a:lnTo>
+                  <a:lnTo>
+                    <a:pt x="2335349" y="2533914"/>
+                  </a:lnTo>
+                  <a:lnTo>
+                    <a:pt x="2406971" y="2571021"/>
+                  </a:lnTo>
+                  <a:lnTo>
+                    <a:pt x="2478594" y="2606679"/>
+                  </a:lnTo>
+                  <a:lnTo>
+                    <a:pt x="2550216" y="2640944"/>
+                  </a:lnTo>
+                  <a:lnTo>
+                    <a:pt x="2621839" y="2673870"/>
+                  </a:lnTo>
+                  <a:lnTo>
+                    <a:pt x="2693461" y="2705509"/>
+                  </a:lnTo>
+                  <a:lnTo>
+                    <a:pt x="2765084" y="2735913"/>
+                  </a:lnTo>
+                  <a:lnTo>
+                    <a:pt x="2836706" y="2765129"/>
+                  </a:lnTo>
+                  <a:lnTo>
+                    <a:pt x="2908329" y="2793203"/>
+                  </a:lnTo>
+                  <a:lnTo>
+                    <a:pt x="2979951" y="2820181"/>
+                  </a:lnTo>
+                  <a:lnTo>
+                    <a:pt x="3051574" y="2846104"/>
+                  </a:lnTo>
+                  <a:lnTo>
+                    <a:pt x="3123196" y="2871015"/>
+                  </a:lnTo>
+                  <a:lnTo>
+                    <a:pt x="3194819" y="2894953"/>
+                  </a:lnTo>
+                  <a:lnTo>
+                    <a:pt x="3266441" y="2917955"/>
+                  </a:lnTo>
+                  <a:lnTo>
+                    <a:pt x="3338064" y="2940059"/>
+                  </a:lnTo>
+                  <a:lnTo>
+                    <a:pt x="3409687" y="2961300"/>
+                  </a:lnTo>
+                  <a:lnTo>
+                    <a:pt x="3481309" y="2981710"/>
+                  </a:lnTo>
+                  <a:lnTo>
+                    <a:pt x="3552932" y="3001323"/>
+                  </a:lnTo>
+                  <a:lnTo>
+                    <a:pt x="3624554" y="3020170"/>
+                  </a:lnTo>
+                  <a:lnTo>
+                    <a:pt x="3696177" y="3038281"/>
+                  </a:lnTo>
+                  <a:lnTo>
+                    <a:pt x="3767799" y="3055684"/>
+                  </a:lnTo>
+                  <a:lnTo>
+                    <a:pt x="3839422" y="3072407"/>
+                  </a:lnTo>
+                  <a:lnTo>
+                    <a:pt x="3911044" y="3088477"/>
+                  </a:lnTo>
+                  <a:lnTo>
+                    <a:pt x="3982667" y="3103919"/>
+                  </a:lnTo>
+                  <a:lnTo>
+                    <a:pt x="4054289" y="3118758"/>
+                  </a:lnTo>
+                  <a:lnTo>
+                    <a:pt x="4125912" y="3133017"/>
+                  </a:lnTo>
+                  <a:lnTo>
+                    <a:pt x="4197534" y="3146719"/>
+                  </a:lnTo>
+                  <a:lnTo>
+                    <a:pt x="4269157" y="3159886"/>
+                  </a:lnTo>
+                  <a:lnTo>
+                    <a:pt x="4340779" y="3172538"/>
+                  </a:lnTo>
+                  <a:lnTo>
+                    <a:pt x="4412402" y="3184696"/>
+                  </a:lnTo>
+                  <a:lnTo>
+                    <a:pt x="4484024" y="3196379"/>
+                  </a:lnTo>
+                  <a:lnTo>
+                    <a:pt x="4555647" y="3207606"/>
+                  </a:lnTo>
+                  <a:lnTo>
+                    <a:pt x="4627269" y="3218394"/>
+                  </a:lnTo>
+                  <a:lnTo>
+                    <a:pt x="4698892" y="3228760"/>
+                  </a:lnTo>
+                  <a:lnTo>
+                    <a:pt x="4770515" y="3238722"/>
+                  </a:lnTo>
+                  <a:lnTo>
+                    <a:pt x="4842137" y="3248294"/>
+                  </a:lnTo>
+                  <a:lnTo>
+                    <a:pt x="4913760" y="3257493"/>
+                  </a:lnTo>
+                  <a:lnTo>
+                    <a:pt x="4985382" y="3266332"/>
+                  </a:lnTo>
+                  <a:lnTo>
+                    <a:pt x="5057005" y="3274826"/>
+                  </a:lnTo>
+                  <a:lnTo>
+                    <a:pt x="5128627" y="3282988"/>
+                  </a:lnTo>
+                  <a:lnTo>
+                    <a:pt x="5200250" y="3290831"/>
+                  </a:lnTo>
+                  <a:lnTo>
+                    <a:pt x="5271872" y="3298367"/>
+                  </a:lnTo>
+                  <a:lnTo>
+                    <a:pt x="5343495" y="3305610"/>
+                  </a:lnTo>
+                  <a:lnTo>
+                    <a:pt x="5415117" y="3312569"/>
+                  </a:lnTo>
+                  <a:lnTo>
+                    <a:pt x="5486740" y="3319256"/>
+                  </a:lnTo>
+                  <a:lnTo>
+                    <a:pt x="5558362" y="3325683"/>
+                  </a:lnTo>
+                  <a:lnTo>
+                    <a:pt x="5629985" y="3331858"/>
+                  </a:lnTo>
+                  <a:lnTo>
+                    <a:pt x="5701607" y="3337792"/>
+                  </a:lnTo>
+                  <a:lnTo>
+                    <a:pt x="5773230" y="3343494"/>
+                  </a:lnTo>
+                  <a:lnTo>
+                    <a:pt x="5844852" y="3348973"/>
+                  </a:lnTo>
+                  <a:lnTo>
+                    <a:pt x="5916475" y="3354238"/>
+                  </a:lnTo>
+                  <a:lnTo>
+                    <a:pt x="5988097" y="3359298"/>
+                  </a:lnTo>
+                  <a:lnTo>
+                    <a:pt x="6059720" y="3364159"/>
+                  </a:lnTo>
+                  <a:lnTo>
+                    <a:pt x="6131343" y="3368831"/>
+                  </a:lnTo>
+                  <a:lnTo>
+                    <a:pt x="6202965" y="3373321"/>
+                  </a:lnTo>
+                  <a:lnTo>
+                    <a:pt x="6274588" y="3377635"/>
+                  </a:lnTo>
+                  <a:lnTo>
+                    <a:pt x="6346210" y="3381780"/>
+                  </a:lnTo>
+                  <a:lnTo>
+                    <a:pt x="6417833" y="3385764"/>
                   </a:lnTo>
                 </a:path>
               </a:pathLst>
@@ -4944,7 +4944,7 @@
           </p:nvSpPr>
           <p:spPr>
             <a:xfrm>
-              <a:off x="4401933" y="2073503"/>
+              <a:off x="4423736" y="2073503"/>
               <a:ext cx="0" cy="3649639"/>
             </a:xfrm>
             <a:custGeom>
@@ -4987,7 +4987,7 @@
           </p:nvSpPr>
           <p:spPr>
             <a:xfrm>
-              <a:off x="3507589" y="2073503"/>
+              <a:off x="3470882" y="2073503"/>
               <a:ext cx="0" cy="3649639"/>
             </a:xfrm>
             <a:custGeom>
@@ -5030,7 +5030,7 @@
           </p:nvSpPr>
           <p:spPr>
             <a:xfrm>
-              <a:off x="5433405" y="2073503"/>
+              <a:off x="5437283" y="2073503"/>
               <a:ext cx="0" cy="3649639"/>
             </a:xfrm>
             <a:custGeom>
@@ -5303,7 +5303,7 @@
           </p:nvSpPr>
           <p:spPr>
             <a:xfrm>
-              <a:off x="842324" y="5785772"/>
+              <a:off x="843419" y="5785772"/>
               <a:ext cx="161574" cy="80101"/>
             </a:xfrm>
             <a:prstGeom prst="rect">
@@ -5349,7 +5349,7 @@
           </p:nvSpPr>
           <p:spPr>
             <a:xfrm>
-              <a:off x="1681960" y="5785772"/>
+              <a:off x="1681469" y="5785772"/>
               <a:ext cx="161574" cy="80101"/>
             </a:xfrm>
             <a:prstGeom prst="rect">
@@ -5395,7 +5395,7 @@
           </p:nvSpPr>
           <p:spPr>
             <a:xfrm>
-              <a:off x="2521596" y="5785772"/>
+              <a:off x="2519520" y="5785772"/>
               <a:ext cx="161574" cy="80101"/>
             </a:xfrm>
             <a:prstGeom prst="rect">
@@ -5441,7 +5441,7 @@
           </p:nvSpPr>
           <p:spPr>
             <a:xfrm>
-              <a:off x="3361232" y="5785772"/>
+              <a:off x="3357571" y="5785772"/>
               <a:ext cx="161574" cy="80101"/>
             </a:xfrm>
             <a:prstGeom prst="rect">
@@ -5487,7 +5487,7 @@
           </p:nvSpPr>
           <p:spPr>
             <a:xfrm>
-              <a:off x="4200868" y="5785772"/>
+              <a:off x="4195621" y="5785772"/>
               <a:ext cx="161574" cy="80101"/>
             </a:xfrm>
             <a:prstGeom prst="rect">
@@ -5533,7 +5533,7 @@
           </p:nvSpPr>
           <p:spPr>
             <a:xfrm>
-              <a:off x="5090202" y="5785772"/>
+              <a:off x="5083370" y="5785772"/>
               <a:ext cx="62179" cy="80101"/>
             </a:xfrm>
             <a:prstGeom prst="rect">
@@ -5579,7 +5579,7 @@
           </p:nvSpPr>
           <p:spPr>
             <a:xfrm>
-              <a:off x="5898749" y="5785772"/>
+              <a:off x="5890331" y="5785772"/>
               <a:ext cx="124358" cy="80101"/>
             </a:xfrm>
             <a:prstGeom prst="rect">
@@ -5625,7 +5625,7 @@
           </p:nvSpPr>
           <p:spPr>
             <a:xfrm>
-              <a:off x="6738385" y="5785772"/>
+              <a:off x="6728381" y="5785772"/>
               <a:ext cx="124358" cy="80101"/>
             </a:xfrm>
             <a:prstGeom prst="rect">
@@ -5671,7 +5671,7 @@
           </p:nvSpPr>
           <p:spPr>
             <a:xfrm>
-              <a:off x="7578021" y="5785772"/>
+              <a:off x="7566432" y="5785772"/>
               <a:ext cx="124358" cy="80101"/>
             </a:xfrm>
             <a:prstGeom prst="rect">
@@ -5717,7 +5717,7 @@
           </p:nvSpPr>
           <p:spPr>
             <a:xfrm>
-              <a:off x="8417657" y="5785772"/>
+              <a:off x="8404483" y="5785772"/>
               <a:ext cx="124358" cy="80101"/>
             </a:xfrm>
             <a:prstGeom prst="rect">
@@ -5888,7 +5888,7 @@
                   <a:latin typeface="Helvetica"/>
                   <a:cs typeface="Helvetica"/>
                 </a:rPr>
-                <a:t>subHR per 10 % decline: 1.60 (0.98-2.62), p_Bonf = 0.361 (n = 6)  |  per IQR decline (Δ = 22.9 %): 2.95 (0.95-9.15)  |  IQR: [-19.2, 3.7] %</a:t>
+                <a:t>subHR per 10 % decline: 1.59 (0.98-2.60), p_Bonf = 0.372 (n = 6)  |  per IQR decline (Δ = 23.5 %): 2.99 (0.95-9.42)  |  IQR: [-19.6, 3.9] %</a:t>
               </a:r>
             </a:p>
           </p:txBody>
